--- a/Subgroups/ASX/InstantiationReview/ASX-Instantiation-Findings.pptx
+++ b/Subgroups/ASX/InstantiationReview/ASX-Instantiation-Findings.pptx
@@ -609,7 +609,12 @@
           </a:p>
           <a:p>
             <a:r>
-              <a:t>Initialization is what forces the choice: an Init message must declare what a platform carries, so it has to pick one representation; the Report side only consumes sensor output (log P2). The same carried-equipment pattern returns in weapon / manipulator / cargo typing (W2/E2/L1 -&gt; Q-L) and in non-imaging sensor reports (Y1 -&gt; Q-I/Q-Q). Decision Q-C: pick one model and apply it everywhere.</a:t>
+              <a:t>Initialization is what forces the choice: an Init message must declare what a platform carries, so it has to pick one representation; the Report side only consumes sensor output (log P2). The same carried-equipment pattern returns in weapon / manipulator / cargo typing (W2/E2/L1 -&gt; Q-L) and in non-imaging sensor reports (Y1 -&gt; Q-I/Q-Q).</a:t>
+            </a:r>
+          </a:p>
+          <a:p>
+            <a:r>
+              <a:t>Decided in direction by the sub-group: sensors are reworked on existing standards - which is what the sensor-characterization slice proposed (Curt's item). v0.0.4 only stakes placeholders: SensorTypeCode with no individuals, and hasSensorCapability typed by MediaTypeCode rather than SensorTypeCode. So the residual is the standards survey itself, then re-pointing the property; Q-Y (own extension or ASX section) is still open.</a:t>
             </a:r>
           </a:p>
         </p:txBody>
@@ -684,7 +689,7 @@
           </a:p>
           <a:p>
             <a:r>
-              <a:t>Note the current state: v0.0.3 dropped the Swarm class, and CollecticeRoboticSystem (the typo is in the model - O1) is still under PhysicalEntity. Decision Q-B.</a:t>
+              <a:t>Decided by the sub-group: derive the collective/Swarm from CollectiveEntity. Current state: v0.0.3 dropped the Swarm class and v0.0.4 leaves CollecticeRoboticSystem (the typo is in the model - O1, now also in the XSD) under PhysicalEntity - so this is the first thing to apply, and the cheapest: one re-parenting axiom plus the spelling fix. Membership and command relations already exist, so the residual swarm work after that is small (Q-J).</a:t>
             </a:r>
           </a:p>
         </p:txBody>
@@ -1069,7 +1074,7 @@
           </a:p>
           <a:p>
             <a:r>
-              <a:t>The ask, part 1 - structure: Q-A UAV/robot typing, Q-B a taskable swarm, Q-C one sensor model, Q-D one autonomy vocabulary. These four settle the shape of the model and unblock Initialization.</a:t>
+              <a:t>Part 1 - structure, now decided: Q-A autonomy as a facet on the Platform subtree, Q-B the collective from CollectiveEntity, Q-C sensors reworked on existing standards; Q-D is settled in practice by v0.0.4 and only needs stating. These four settle the shape of the model; applying them in the OWL unblocks Initialization.</a:t>
             </a:r>
           </a:p>
           <a:p>
@@ -1299,7 +1304,7 @@
           </a:p>
           <a:p>
             <a:r>
-              <a:t>The same decisions, grouped by commitment level: safe corrections (typos, the UUIDBase slip) are unambiguous; structural decisions need the group; content types need design. Nothing has been applied to the model or the workbooks - all items are proposals pending buy-in.</a:t>
+              <a:t>The same decisions, grouped by commitment level: safe corrections (typos, the UUIDBase slip) are unambiguous; the structural decisions are now made and need applying in the OWL; content types need design. Nothing has been applied to the model or the workbooks by this review - the structural items are the group's decisions, the rest are proposals pending buy-in.</a:t>
             </a:r>
           </a:p>
           <a:p>
@@ -1374,7 +1379,7 @@
           <a:lstStyle/>
           <a:p>
             <a:r>
-              <a:t>The one-slide version of the talk. If discussion takes over later, this slide plus the decision register (slides 16-18) is the minimum to land.</a:t>
+              <a:t>The one-slide version of the talk. If discussion takes over later, this slide plus the decision register (slides 16-18) is the minimum to land. New since July: the three structural decisions are made (recorded 2026-10-14) and the model is v0.0.4 - so the structural block (slides 8-11) is now decided-state plus residual, and the ask is implementation.</a:t>
             </a:r>
           </a:p>
           <a:p>
@@ -1449,12 +1454,12 @@
           <a:lstStyle/>
           <a:p>
             <a:r>
-              <a:t>The recommended order: settle Q-A / Q-B first (they unblock Initialization), complete the Initialization instantiations, add the two CASEVAC content types, reconcile the two tracks and fix the typos, and optionally adopt the diff-able workbooks so message edits can be reviewed in git.</a:t>
-            </a:r>
-          </a:p>
-          <a:p>
-            <a:r>
-              <a:t>Where the ball is: sourcing is essentially complete - every gap this review raised is grounded in a real mission (one nice-to-have left: a dedicated autonomous-CASEVAC mission). The remaining work - the attribute layer, the reconciliation, the 24 decisions - is modeling work; more scenarios will not fill it.</a:t>
+              <a:t>The recommended order now that the structural decisions are made: apply P7 (cheapest, one axiom), apply P1 (retire the Robot tree and home the new properties), run the sensor survey, fix the typos and finish the attribute layer, then re-cut the Initialization tabs and add the two CASEVAC content types; optionally adopt the diff-able workbooks so message edits can be reviewed in git.</a:t>
+            </a:r>
+          </a:p>
+          <a:p>
+            <a:r>
+              <a:t>Where the ball is: sourcing is essentially complete - every gap this review raised is grounded in a real mission (one nice-to-have left: a dedicated autonomous-CASEVAC mission). The structural decisions are made; the remaining work - applying them, the attribute layer, the ~20 content-type decisions - is modeling work; more scenarios will not fill it.</a:t>
             </a:r>
           </a:p>
         </p:txBody>
@@ -1829,7 +1834,7 @@
           <a:lstStyle/>
           <a:p>
             <a:r>
-              <a:t>Five deliverables: ~34 new message instantiations in diff-able workbooks; a 15-record sourced scenario corpus; a findings log distilled into 24 decisions; a finding-by-finding reconciliation with v0.0.3; and the prior-art discoveries (BML WhoMeasuredType first among them). All proposal-only.</a:t>
+              <a:t>Five deliverables: ~34 new message instantiations in diff-able workbooks; a 15-record sourced scenario corpus; a findings log distilled into 24 decisions; a finding-by-finding reconciliation with v0.0.3 and v0.0.4 (plus the group's decisions); and the prior-art discoveries (BML WhoMeasuredType first among them). All proposal-only.</a:t>
             </a:r>
           </a:p>
           <a:p>
@@ -2069,12 +2074,12 @@
           </a:p>
           <a:p>
             <a:r>
-              <a:t>The outlook in one line: the OWL (v0.0.1, January) and the spreadsheets (June) evolved separately, so several findings look like drift rather than gaps; v0.0.3 (July) shows the model moving - first datatype properties (v0.0.1 had none), the Video Detection Report folded into the OWL, an AutonomyLevelCode model - and brings P1 concretely into the model by declaring both typing trees.</a:t>
-            </a:r>
-          </a:p>
-          <a:p>
-            <a:r>
-              <a:t>The catch-up list is short and known: the attribute layer, one autonomy vocabulary (three today), one sensor model (three today - that is P2, next section), and two wiring items (the hasAutonomousRoleCode range, the circular owl:imports). Everything else v0.0.3 still lacks - taskable collective, generic Detection Report, rationale / robot-to-robot / area content, the two typos - appears on its own slide later. Full finding-by-finding reconciliation: log sec 9.</a:t>
+              <a:t>The outlook in one line: the OWL (v0.0.1, January) and the spreadsheets (June) evolved separately, so several findings look like drift rather than gaps; v0.0.3 (July) showed the model moving - first datatype properties, the Video Detection Report folded in, an AutonomyLevelCode model - and brought P1 concretely into the model by declaring both typing trees. v0.0.4 (August) starts reconciling the tracks from the OWL side: five spreadsheet attributes become properties, the autonomy facet lands on smx#Vehicle, Task gets a per-task autonomy level, the circular import is fixed, and the Concept Mapping workbook tracks per attribute what is done.</a:t>
+            </a:r>
+          </a:p>
+          <a:p>
+            <a:r>
+              <a:t>The catch-up list is short and known: the rest of the attribute layer (Payload / Mobility / Swarm Parameters), stating the one autonomy vocabulary (nearly done), the sensor rework (P2 - direction decided, next section), and the wiring items (four new properties with no home, hasAutonomousRoleCode's range, Robot still in the XSD's ActorEntity choice). Everything else still to define - taskable collective (decided, not yet applied), generic Detection Report, rationale / robot-to-robot / area content, the typos (one fixed, three new) - appears on its own slide later. Full reconciliation: log sec 9 (v0.0.3) and sec 10 (v0.0.4 + decisions).</a:t>
             </a:r>
           </a:p>
         </p:txBody>
@@ -2144,12 +2149,12 @@
           <a:lstStyle/>
           <a:p>
             <a:r>
-              <a:t>The three foundational decisions, all entity-typing: P1 - a UAV/UGV is typed two incompatible ways (ASX Robot tree vs SMX Platform tree); P2 - a sensor has no agreed representation (class vs enum vs equipment); P7 - a swarm is not yet taskable as modeled.</a:t>
-            </a:r>
-          </a:p>
-          <a:p>
-            <a:r>
-              <a:t>The point to land: because all three are typing decisions, Initialization - not Reports - is where the model has to be settled first. The next three slides take P1, P2, and P7 one at a time.</a:t>
+              <a:t>The three foundational decisions, all entity-typing: P1 - a UAV/UGV was typed two incompatible ways (ASX Robot tree vs SMX Platform tree); P2 - a sensor had no agreed representation (class vs enum vs equipment); P7 - a swarm was not taskable as modeled. The sub-group has decided all three: autonomy as a role/facet on the Platform subtree; sensors reworked on existing standards; the collective from CollectiveEntity.</a:t>
+            </a:r>
+          </a:p>
+          <a:p>
+            <a:r>
+              <a:t>The point to land: the decisions are made, the OWL does not yet reflect them (v0.0.4 has P1's shape on the Vehicle side only). The next three slides take P1, P2, and P7 one at a time - each as decided state plus what remains to apply.</a:t>
             </a:r>
           </a:p>
         </p:txBody>
@@ -2224,7 +2229,7 @@
           </a:p>
           <a:p>
             <a:r>
-              <a:t>v0.0.3 declares both trees, so the choice is now concretely in the model to settle (note: its maritime classes sit under Vehicle rather than SurfaceVessel/SubsurfaceVessel). Decision Q-A proposes autonomy as a role/facet on the existing Platform subtree.</a:t>
+              <a:t>Decided by the sub-group: autonomy is a role/facet on the existing Platform subtree. v0.0.4 already has that shape on the Vehicle side - hasControlMode on smx#Vehicle, the four Unmanned*Vehicle classes under it - but the Robot/UAV/UGV tree is still declared (and still a fourth ActorEntity choice in the derived XSD; its maritime classes still sit under Vehicle rather than SurfaceVessel/SubsurfaceVessel). What remains is implementation: retire the Robot tree, pick Vehicle-vs-Platform for the facet, re-parent the maritime pair, and give the four floating v0.0.4 properties a domain on the subtree.</a:t>
             </a:r>
           </a:p>
         </p:txBody>
@@ -5370,7 +5375,7 @@
                 </a:solidFill>
                 <a:latin typeface="Calibri"/>
               </a:rPr>
-              <a:t>C2SIM ASX Sub-group    -    Hyssos    -    July 2026</a:t>
+              <a:t>C2SIM ASX Sub-group    -    Hyssos    -    October 2026 (v0.0.4 re-baseline; P1 / P2 / P7 decided)</a:t>
             </a:r>
           </a:p>
         </p:txBody>
@@ -5906,8 +5911,8 @@
         </p:nvSpPr>
         <p:spPr>
           <a:xfrm>
-            <a:off x="640080" y="4434840"/>
-            <a:ext cx="10972800" cy="1920240"/>
+            <a:off x="640080" y="3931920"/>
+            <a:ext cx="10972800" cy="2423160"/>
           </a:xfrm>
           <a:prstGeom prst="rect">
             <a:avLst/>
@@ -5925,11 +5930,11 @@
                 <a:spcPts val="200"/>
               </a:spcBef>
               <a:spcAft>
-                <a:spcPts val="600"/>
+                <a:spcPts val="400"/>
               </a:spcAft>
             </a:pPr>
             <a:r>
-              <a:rPr sz="1300" b="0" i="0">
+              <a:rPr sz="1200" b="0" i="0">
                 <a:solidFill>
                   <a:srgbClr val="333333"/>
                 </a:solidFill>
@@ -5944,11 +5949,11 @@
                 <a:spcPts val="200"/>
               </a:spcBef>
               <a:spcAft>
-                <a:spcPts val="600"/>
+                <a:spcPts val="400"/>
               </a:spcAft>
             </a:pPr>
             <a:r>
-              <a:rPr sz="1300" b="0" i="0">
+              <a:rPr sz="1200" b="0" i="0">
                 <a:solidFill>
                   <a:srgbClr val="333333"/>
                 </a:solidFill>
@@ -5963,26 +5968,26 @@
                 <a:spcPts val="200"/>
               </a:spcBef>
               <a:spcAft>
-                <a:spcPts val="600"/>
+                <a:spcPts val="400"/>
               </a:spcAft>
             </a:pPr>
             <a:r>
-              <a:rPr sz="1300" b="1" i="0">
-                <a:solidFill>
-                  <a:srgbClr val="C87F0A"/>
-                </a:solidFill>
-                <a:latin typeface="Calibri"/>
-              </a:rPr>
-              <a:t>•  Same pattern downstream:  </a:t>
-            </a:r>
-            <a:r>
-              <a:rPr sz="1300" b="0" i="0">
+              <a:rPr sz="1200" b="1" i="0">
+                <a:solidFill>
+                  <a:srgbClr val="2E7D32"/>
+                </a:solidFill>
+                <a:latin typeface="Calibri"/>
+              </a:rPr>
+              <a:t>•  DIRECTION DECIDED (Q-C):  </a:t>
+            </a:r>
+            <a:r>
+              <a:rPr sz="1200" b="0" i="0">
                 <a:solidFill>
                   <a:srgbClr val="333333"/>
                 </a:solidFill>
                 <a:latin typeface="Calibri"/>
               </a:rPr>
-              <a:t>weapon (W2), manipulator (E2), cargo (L1) hang off the same carried-equipment choice (Q-L); non-imaging sensor reports (Y1) need the sensor typed to say what measured (Q-I/Q-Q).</a:t>
+              <a:t>sensors are being reworked on existing standards - the premise of the sensor-characterization slice (SOSA/SSN + SSN-System first; log sec 6l), which is the candidate survey.</a:t>
             </a:r>
           </a:p>
           <a:p>
@@ -5991,26 +5996,54 @@
                 <a:spcPts val="200"/>
               </a:spcBef>
               <a:spcAft>
-                <a:spcPts val="600"/>
+                <a:spcPts val="400"/>
               </a:spcAft>
             </a:pPr>
             <a:r>
-              <a:rPr sz="1300" b="1" i="0">
+              <a:rPr sz="1200" b="1" i="0">
+                <a:solidFill>
+                  <a:srgbClr val="C87F0A"/>
+                </a:solidFill>
+                <a:latin typeface="Calibri"/>
+              </a:rPr>
+              <a:t>•  Now in v0.0.4:  </a:t>
+            </a:r>
+            <a:r>
+              <a:rPr sz="1200" b="0" i="0">
+                <a:solidFill>
+                  <a:srgbClr val="333333"/>
+                </a:solidFill>
+                <a:latin typeface="Calibri"/>
+              </a:rPr>
+              <a:t>placeholders only - an empty SensorTypeCode code list, and hasSensorCapability with range MediaTypeCode (a capability typed as a media format; V3) and no domain. The three representations still coexist.</a:t>
+            </a:r>
+          </a:p>
+          <a:p>
+            <a:pPr>
+              <a:spcBef>
+                <a:spcPts val="200"/>
+              </a:spcBef>
+              <a:spcAft>
+                <a:spcPts val="400"/>
+              </a:spcAft>
+            </a:pPr>
+            <a:r>
+              <a:rPr sz="1200" b="1" i="0">
                 <a:solidFill>
                   <a:srgbClr val="2E869A"/>
                 </a:solidFill>
                 <a:latin typeface="Calibri"/>
               </a:rPr>
-              <a:t>•  Decision (Q-C):  </a:t>
-            </a:r>
-            <a:r>
-              <a:rPr sz="1300" b="0" i="0">
+              <a:t>•  To apply:  </a:t>
+            </a:r>
+            <a:r>
+              <a:rPr sz="1200" b="0" i="0">
                 <a:solidFill>
                   <a:srgbClr val="333333"/>
                 </a:solidFill>
                 <a:latin typeface="Calibri"/>
               </a:rPr>
-              <a:t>is a sensor a first-class entity/equipment, a class, or an attribute? Pick one model and apply it in Init, Report, and Concept Mapping.</a:t>
+              <a:t>run the survey (6l steps 1-2), re-point hasSensorCapability / fill SensorTypeCode from it, settle Q-Y (own extension vs ASX section). The same carried-equipment pattern returns in weapon (W2), manipulator (E2), cargo (L1) -&gt; Q-L.</a:t>
             </a:r>
           </a:p>
         </p:txBody>
@@ -6053,7 +6086,7 @@
                 </a:solidFill>
                 <a:latin typeface="Calibri"/>
               </a:rPr>
-              <a:t>Initialization-Walk.md + NonVideoSensors-Walk.md  -  log P2 (sec 5) + D2 (sec 2)  -  decision Q-C (log sec 7)</a:t>
+              <a:t>Initialization-Walk.md + NonVideoSensors-Walk.md + Sensor-Characterization-Slice.md  -  log P2 (sec 5) + D2 (sec 2) + sec 10  -  Q-C (decided in direction), Q-Y (open)</a:t>
             </a:r>
           </a:p>
         </p:txBody>
@@ -6087,7 +6120,7 @@
                 </a:solidFill>
                 <a:latin typeface="Calibri"/>
               </a:rPr>
-              <a:t>C2SIM ASX Sub-group   |   Hyssos   |   July 2026</a:t>
+              <a:t>C2SIM ASX Sub-group   |   Hyssos   |   October 2026</a:t>
             </a:r>
           </a:p>
         </p:txBody>
@@ -6784,8 +6817,8 @@
         </p:nvSpPr>
         <p:spPr>
           <a:xfrm>
-            <a:off x="640080" y="4434840"/>
-            <a:ext cx="10972800" cy="1920240"/>
+            <a:off x="640080" y="4389120"/>
+            <a:ext cx="10972800" cy="1965960"/>
           </a:xfrm>
           <a:prstGeom prst="rect">
             <a:avLst/>
@@ -6803,11 +6836,11 @@
                 <a:spcPts val="200"/>
               </a:spcBef>
               <a:spcAft>
-                <a:spcPts val="600"/>
+                <a:spcPts val="300"/>
               </a:spcAft>
             </a:pPr>
             <a:r>
-              <a:rPr sz="1300" b="0" i="0">
+              <a:rPr sz="1150" b="0" i="0">
                 <a:solidFill>
                   <a:srgbClr val="333333"/>
                 </a:solidFill>
@@ -6822,11 +6855,11 @@
                 <a:spcPts val="200"/>
               </a:spcBef>
               <a:spcAft>
-                <a:spcPts val="600"/>
+                <a:spcPts val="300"/>
               </a:spcAft>
             </a:pPr>
             <a:r>
-              <a:rPr sz="1300" b="0" i="0">
+              <a:rPr sz="1150" b="0" i="0">
                 <a:solidFill>
                   <a:srgbClr val="333333"/>
                 </a:solidFill>
@@ -6841,26 +6874,26 @@
                 <a:spcPts val="200"/>
               </a:spcBef>
               <a:spcAft>
-                <a:spcPts val="600"/>
+                <a:spcPts val="300"/>
               </a:spcAft>
             </a:pPr>
             <a:r>
-              <a:rPr sz="1300" b="1" i="0">
-                <a:solidFill>
-                  <a:srgbClr val="C87F0A"/>
-                </a:solidFill>
-                <a:latin typeface="Calibri"/>
-              </a:rPr>
-              <a:t>•  Now in v0.0.3:  </a:t>
-            </a:r>
-            <a:r>
-              <a:rPr sz="1300" b="0" i="0">
+              <a:rPr sz="1150" b="1" i="0">
+                <a:solidFill>
+                  <a:srgbClr val="2E7D32"/>
+                </a:solidFill>
+                <a:latin typeface="Calibri"/>
+              </a:rPr>
+              <a:t>•  DECIDED (Q-B):  </a:t>
+            </a:r>
+            <a:r>
+              <a:rPr sz="1150" b="0" i="0">
                 <a:solidFill>
                   <a:srgbClr val="333333"/>
                 </a:solidFill>
                 <a:latin typeface="Calibri"/>
               </a:rPr>
-              <a:t>the Swarm class was dropped; CollecticeRoboticSystem (sic) remains under PhysicalEntity - still not taskable.</a:t>
+              <a:t>derive the collective/Swarm from CollectiveEntity (already an ActorEntity) rather than the device/artifact tree.</a:t>
             </a:r>
           </a:p>
           <a:p>
@@ -6869,26 +6902,54 @@
                 <a:spcPts val="200"/>
               </a:spcBef>
               <a:spcAft>
-                <a:spcPts val="600"/>
+                <a:spcPts val="300"/>
               </a:spcAft>
             </a:pPr>
             <a:r>
-              <a:rPr sz="1300" b="1" i="0">
+              <a:rPr sz="1150" b="1" i="0">
+                <a:solidFill>
+                  <a:srgbClr val="C87F0A"/>
+                </a:solidFill>
+                <a:latin typeface="Calibri"/>
+              </a:rPr>
+              <a:t>•  Now in v0.0.4:  </a:t>
+            </a:r>
+            <a:r>
+              <a:rPr sz="1150" b="0" i="0">
+                <a:solidFill>
+                  <a:srgbClr val="333333"/>
+                </a:solidFill>
+                <a:latin typeface="Calibri"/>
+              </a:rPr>
+              <a:t>not yet applied - no Swarm class (dropped in v0.0.3); CollecticeRoboticSystem (sic) still under RoboticSystem -&gt; Device -&gt; Artifact -&gt; PhysicalEntity, and now also in the derived XSD.</a:t>
+            </a:r>
+          </a:p>
+          <a:p>
+            <a:pPr>
+              <a:spcBef>
+                <a:spcPts val="200"/>
+              </a:spcBef>
+              <a:spcAft>
+                <a:spcPts val="300"/>
+              </a:spcAft>
+            </a:pPr>
+            <a:r>
+              <a:rPr sz="1150" b="1" i="0">
                 <a:solidFill>
                   <a:srgbClr val="2E869A"/>
                 </a:solidFill>
                 <a:latin typeface="Calibri"/>
               </a:rPr>
-              <a:t>•  Decision (Q-B):  </a:t>
-            </a:r>
-            <a:r>
-              <a:rPr sz="1300" b="0" i="0">
+              <a:t>•  To apply:  </a:t>
+            </a:r>
+            <a:r>
+              <a:rPr sz="1150" b="0" i="0">
                 <a:solidFill>
                   <a:srgbClr val="333333"/>
                 </a:solidFill>
                 <a:latin typeface="Calibri"/>
               </a:rPr>
-              <a:t>derive the collective/Swarm from CollectiveEntity (already an ActorEntity) rather than the device/artifact tree.</a:t>
+              <a:t>re-parent (and re-spell, O1) the collective class under CollectiveEntity - one axiom - then the small residuals (Q-J: network params, leader role, aggregation Z1, lifecycle Z2); mixed membership (P10) becomes hasSubordinate over Platform subtypes.</a:t>
             </a:r>
           </a:p>
         </p:txBody>
@@ -6931,7 +6992,7 @@
                 </a:solidFill>
                 <a:latin typeface="Calibri"/>
               </a:rPr>
-              <a:t>Swarm-Walk.md  -  log P7 (secs 5, 6d)  -  decision Q-B (log sec 7)</a:t>
+              <a:t>Swarm-Walk.md  -  log P7 (secs 5, 6d) + sec 10  -  Q-B (log sec 7, decided)</a:t>
             </a:r>
           </a:p>
         </p:txBody>
@@ -6965,7 +7026,7 @@
                 </a:solidFill>
                 <a:latin typeface="Calibri"/>
               </a:rPr>
-              <a:t>C2SIM ASX Sub-group   |   Hyssos   |   July 2026</a:t>
+              <a:t>C2SIM ASX Sub-group   |   Hyssos   |   October 2026</a:t>
             </a:r>
           </a:p>
         </p:txBody>
@@ -7422,7 +7483,7 @@
                 </a:solidFill>
                 <a:latin typeface="Calibri"/>
               </a:rPr>
-              <a:t>C2SIM ASX Sub-group   |   Hyssos   |   July 2026</a:t>
+              <a:t>C2SIM ASX Sub-group   |   Hyssos   |   October 2026</a:t>
             </a:r>
           </a:p>
         </p:txBody>
@@ -7907,7 +7968,7 @@
                 </a:solidFill>
                 <a:latin typeface="Calibri"/>
               </a:rPr>
-              <a:t>C2SIM ASX Sub-group   |   Hyssos   |   July 2026</a:t>
+              <a:t>C2SIM ASX Sub-group   |   Hyssos   |   October 2026</a:t>
             </a:r>
           </a:p>
         </p:txBody>
@@ -8364,7 +8425,7 @@
                 </a:solidFill>
                 <a:latin typeface="Calibri"/>
               </a:rPr>
-              <a:t>C2SIM ASX Sub-group   |   Hyssos   |   July 2026</a:t>
+              <a:t>C2SIM ASX Sub-group   |   Hyssos   |   October 2026</a:t>
             </a:r>
           </a:p>
         </p:txBody>
@@ -8793,7 +8854,7 @@
                 </a:solidFill>
                 <a:latin typeface="Calibri"/>
               </a:rPr>
-              <a:t>C2SIM ASX Sub-group   |   Hyssos   |   July 2026</a:t>
+              <a:t>C2SIM ASX Sub-group   |   Hyssos   |   October 2026</a:t>
             </a:r>
           </a:p>
         </p:txBody>
@@ -8923,7 +8984,7 @@
                 </a:solidFill>
                 <a:latin typeface="Calibri"/>
               </a:rPr>
-              <a:t>Decisions (1/3): model structure</a:t>
+              <a:t>Decisions (1/3): model structure - decided</a:t>
             </a:r>
           </a:p>
         </p:txBody>
@@ -8957,7 +9018,7 @@
                 </a:solidFill>
                 <a:latin typeface="Calibri"/>
               </a:rPr>
-              <a:t>Full register - all 24, with what each resolves: log section 7</a:t>
+              <a:t>Full register - all 24, with what each resolves: log section 7; decisions + residuals: section 10</a:t>
             </a:r>
           </a:p>
         </p:txBody>
@@ -8970,8 +9031,8 @@
         </p:nvSpPr>
         <p:spPr>
           <a:xfrm>
-            <a:off x="640080" y="1737360"/>
-            <a:ext cx="10972800" cy="4617720"/>
+            <a:off x="640080" y="1645920"/>
+            <a:ext cx="10972800" cy="4709160"/>
           </a:xfrm>
           <a:prstGeom prst="rect">
             <a:avLst/>
@@ -8989,26 +9050,26 @@
                 <a:spcPts val="200"/>
               </a:spcBef>
               <a:spcAft>
-                <a:spcPts val="1800"/>
+                <a:spcPts val="1400"/>
               </a:spcAft>
             </a:pPr>
             <a:r>
-              <a:rPr sz="1800" b="1" i="0">
-                <a:solidFill>
-                  <a:srgbClr val="2E869A"/>
-                </a:solidFill>
-                <a:latin typeface="Calibri"/>
-              </a:rPr>
-              <a:t>•  Q-A  </a:t>
-            </a:r>
-            <a:r>
-              <a:rPr sz="1800" b="0" i="0">
+              <a:rPr sz="1550" b="1" i="0">
+                <a:solidFill>
+                  <a:srgbClr val="2E7D32"/>
+                </a:solidFill>
+                <a:latin typeface="Calibri"/>
+              </a:rPr>
+              <a:t>•  Q-A  DECIDED  </a:t>
+            </a:r>
+            <a:r>
+              <a:rPr sz="1550" b="0" i="0">
                 <a:solidFill>
                   <a:srgbClr val="333333"/>
                 </a:solidFill>
                 <a:latin typeface="Calibri"/>
               </a:rPr>
-              <a:t>UAV/robot typing: a role on the existing Platform tree, or a parallel Robot tree?</a:t>
+              <a:t>UAV/robot typing: autonomy is a role/facet on the existing Platform subtree (not a parallel Robot tree). To apply: retire the Robot tree, home the new properties.</a:t>
             </a:r>
           </a:p>
           <a:p>
@@ -9017,26 +9078,26 @@
                 <a:spcPts val="200"/>
               </a:spcBef>
               <a:spcAft>
-                <a:spcPts val="1800"/>
+                <a:spcPts val="1400"/>
               </a:spcAft>
             </a:pPr>
             <a:r>
-              <a:rPr sz="1800" b="1" i="0">
-                <a:solidFill>
-                  <a:srgbClr val="2E869A"/>
-                </a:solidFill>
-                <a:latin typeface="Calibri"/>
-              </a:rPr>
-              <a:t>•  Q-B  </a:t>
-            </a:r>
-            <a:r>
-              <a:rPr sz="1800" b="0" i="0">
+              <a:rPr sz="1550" b="1" i="0">
+                <a:solidFill>
+                  <a:srgbClr val="2E7D32"/>
+                </a:solidFill>
+                <a:latin typeface="Calibri"/>
+              </a:rPr>
+              <a:t>•  Q-B  DECIDED  </a:t>
+            </a:r>
+            <a:r>
+              <a:rPr sz="1550" b="0" i="0">
                 <a:solidFill>
                   <a:srgbClr val="333333"/>
                 </a:solidFill>
                 <a:latin typeface="Calibri"/>
               </a:rPr>
-              <a:t>Swarm: derive from CollectiveEntity (ActorEntity) so it can be tasked.</a:t>
+              <a:t>Swarm: the collective derives from CollectiveEntity (ActorEntity) so it can be tasked. To apply: re-parent + re-spell the class.</a:t>
             </a:r>
           </a:p>
           <a:p>
@@ -9045,26 +9106,26 @@
                 <a:spcPts val="200"/>
               </a:spcBef>
               <a:spcAft>
-                <a:spcPts val="1800"/>
+                <a:spcPts val="1400"/>
               </a:spcAft>
             </a:pPr>
             <a:r>
-              <a:rPr sz="1800" b="1" i="0">
-                <a:solidFill>
-                  <a:srgbClr val="2E869A"/>
-                </a:solidFill>
-                <a:latin typeface="Calibri"/>
-              </a:rPr>
-              <a:t>•  Q-C  </a:t>
-            </a:r>
-            <a:r>
-              <a:rPr sz="1800" b="0" i="0">
+              <a:rPr sz="1550" b="1" i="0">
+                <a:solidFill>
+                  <a:srgbClr val="2E7D32"/>
+                </a:solidFill>
+                <a:latin typeface="Calibri"/>
+              </a:rPr>
+              <a:t>•  Q-C  DIRECTION DECIDED  </a:t>
+            </a:r>
+            <a:r>
+              <a:rPr sz="1550" b="0" i="0">
                 <a:solidFill>
                   <a:srgbClr val="333333"/>
                 </a:solidFill>
                 <a:latin typeface="Calibri"/>
               </a:rPr>
-              <a:t>Sensor: entity, class, or attribute - choose one model and apply it everywhere.</a:t>
+              <a:t>Sensor: reworked on existing standards (the sensor-characterization slice). To apply: the survey, then re-point hasSensorCapability.</a:t>
             </a:r>
           </a:p>
           <a:p>
@@ -9073,26 +9134,26 @@
                 <a:spcPts val="200"/>
               </a:spcBef>
               <a:spcAft>
-                <a:spcPts val="1800"/>
+                <a:spcPts val="1400"/>
               </a:spcAft>
             </a:pPr>
             <a:r>
-              <a:rPr sz="1800" b="1" i="0">
-                <a:solidFill>
-                  <a:srgbClr val="2E869A"/>
-                </a:solidFill>
-                <a:latin typeface="Calibri"/>
-              </a:rPr>
-              <a:t>•  Q-D  </a:t>
-            </a:r>
-            <a:r>
-              <a:rPr sz="1800" b="0" i="0">
+              <a:rPr sz="1550" b="1" i="0">
+                <a:solidFill>
+                  <a:srgbClr val="C87F0A"/>
+                </a:solidFill>
+                <a:latin typeface="Calibri"/>
+              </a:rPr>
+              <a:t>•  Q-D  nearly done  </a:t>
+            </a:r>
+            <a:r>
+              <a:rPr sz="1550" b="0" i="0">
                 <a:solidFill>
                   <a:srgbClr val="333333"/>
                 </a:solidFill>
                 <a:latin typeface="Calibri"/>
               </a:rPr>
-              <a:t>Autonomy: choose one normative vocabulary.</a:t>
+              <a:t>Autonomy: v0.0.4 values both new autonomy properties from AutonomyLevelCode and marks NavigationAutonomy as covered - state it and retire/map the two spreadsheet lists.</a:t>
             </a:r>
           </a:p>
         </p:txBody>
@@ -9126,7 +9187,7 @@
                 </a:solidFill>
                 <a:latin typeface="Calibri"/>
               </a:rPr>
-              <a:t>C2SIM ASX Sub-group   |   Hyssos   |   July 2026</a:t>
+              <a:t>C2SIM ASX Sub-group   |   Hyssos   |   October 2026</a:t>
             </a:r>
           </a:p>
         </p:txBody>
@@ -9599,7 +9660,7 @@
                 </a:solidFill>
                 <a:latin typeface="Calibri"/>
               </a:rPr>
-              <a:t>C2SIM ASX Sub-group   |   Hyssos   |   July 2026</a:t>
+              <a:t>C2SIM ASX Sub-group   |   Hyssos   |   October 2026</a:t>
             </a:r>
           </a:p>
         </p:txBody>
@@ -10128,7 +10189,7 @@
                 </a:solidFill>
                 <a:latin typeface="Calibri"/>
               </a:rPr>
-              <a:t>C2SIM ASX Sub-group   |   Hyssos   |   July 2026</a:t>
+              <a:t>C2SIM ASX Sub-group   |   Hyssos   |   October 2026</a:t>
             </a:r>
           </a:p>
         </p:txBody>
@@ -10358,11 +10419,11 @@
             <a:r>
               <a:rPr sz="1400" b="1" i="0">
                 <a:solidFill>
-                  <a:srgbClr val="C87F0A"/>
-                </a:solidFill>
-                <a:latin typeface="Calibri"/>
-              </a:rPr>
-              <a:t>•  Structural (decide first):  </a:t>
+                  <a:srgbClr val="2E7D32"/>
+                </a:solidFill>
+                <a:latin typeface="Calibri"/>
+              </a:rPr>
+              <a:t>•  Structural (decided - apply in the OWL):  </a:t>
             </a:r>
             <a:r>
               <a:rPr sz="1400" b="0" i="0">
@@ -10371,7 +10432,7 @@
                 </a:solidFill>
                 <a:latin typeface="Calibri"/>
               </a:rPr>
-              <a:t>UAV/robot typing (Q-A); Swarm -&gt; CollectiveEntity so it is taskable (Q-B); one sensor model (Q-C); one autonomy vocabulary (Q-D).</a:t>
+              <a:t>autonomy as a facet on the Platform subtree, Robot tree retired (Q-A); collective -&gt; CollectiveEntity (Q-B); sensors reworked on existing standards (Q-C); state the one autonomy vocabulary (Q-D). Plus the new v0.0.4 typos (hasAutonomusParameters O4, versionInfo O5, Operator comment O6) and the four floating properties (V2).</a:t>
             </a:r>
           </a:p>
           <a:p>
@@ -10495,7 +10556,7 @@
                 </a:solidFill>
                 <a:latin typeface="Calibri"/>
               </a:rPr>
-              <a:t>C2SIM ASX Sub-group   |   Hyssos   |   July 2026</a:t>
+              <a:t>C2SIM ASX Sub-group   |   Hyssos   |   October 2026</a:t>
             </a:r>
           </a:p>
         </p:txBody>
@@ -10672,7 +10733,7 @@
         </p:nvSpPr>
         <p:spPr>
           <a:xfrm>
-            <a:off x="640080" y="1600200"/>
+            <a:off x="640080" y="1463040"/>
             <a:ext cx="10972800" cy="4754880"/>
           </a:xfrm>
           <a:prstGeom prst="rect">
@@ -10691,11 +10752,11 @@
                 <a:spcPts val="200"/>
               </a:spcBef>
               <a:spcAft>
-                <a:spcPts val="1200"/>
+                <a:spcPts val="900"/>
               </a:spcAft>
             </a:pPr>
             <a:r>
-              <a:rPr sz="1450" b="1" i="0">
+              <a:rPr sz="1350" b="1" i="0">
                 <a:solidFill>
                   <a:srgbClr val="1F3A5F"/>
                 </a:solidFill>
@@ -10704,7 +10765,7 @@
               <a:t>•  What was done:  </a:t>
             </a:r>
             <a:r>
-              <a:rPr sz="1450" b="0" i="0">
+              <a:rPr sz="1350" b="0" i="0">
                 <a:solidFill>
                   <a:srgbClr val="333333"/>
                 </a:solidFill>
@@ -10719,11 +10780,11 @@
                 <a:spcPts val="200"/>
               </a:spcBef>
               <a:spcAft>
-                <a:spcPts val="1200"/>
+                <a:spcPts val="900"/>
               </a:spcAft>
             </a:pPr>
             <a:r>
-              <a:rPr sz="1450" b="1" i="0">
+              <a:rPr sz="1350" b="1" i="0">
                 <a:solidFill>
                   <a:srgbClr val="1F3A5F"/>
                 </a:solidFill>
@@ -10732,13 +10793,13 @@
               <a:t>•  What it surfaced:  </a:t>
             </a:r>
             <a:r>
-              <a:rPr sz="1450" b="0" i="0">
+              <a:rPr sz="1350" b="0" i="0">
                 <a:solidFill>
                   <a:srgbClr val="333333"/>
                 </a:solidFill>
                 <a:latin typeface="Calibri"/>
               </a:rPr>
-              <a:t>three structural typing decisions come first - UAV/robot typing (P1), sensor representation (P2), a taskable swarm (P7) - and behind them an attribute layer still to be built (v0.0.1 had 0 datatype properties; v0.0.3 starts it).</a:t>
+              <a:t>three structural typing decisions came first - UAV/robot typing (P1), sensor representation (P2), a taskable swarm (P7) - and behind them an attribute layer still being built (v0.0.1 had 0 datatype properties; v0.0.3 starts it, v0.0.4 adds five platform attributes).</a:t>
             </a:r>
           </a:p>
           <a:p>
@@ -10747,26 +10808,26 @@
                 <a:spcPts val="200"/>
               </a:spcBef>
               <a:spcAft>
-                <a:spcPts val="1200"/>
+                <a:spcPts val="900"/>
               </a:spcAft>
             </a:pPr>
             <a:r>
-              <a:rPr sz="1450" b="1" i="0">
+              <a:rPr sz="1350" b="1" i="0">
                 <a:solidFill>
                   <a:srgbClr val="2E7D32"/>
                 </a:solidFill>
                 <a:latin typeface="Calibri"/>
               </a:rPr>
-              <a:t>•  The good news:  </a:t>
-            </a:r>
-            <a:r>
-              <a:rPr sz="1450" b="0" i="0">
+              <a:t>•  Decided since:  </a:t>
+            </a:r>
+            <a:r>
+              <a:rPr sz="1350" b="0" i="0">
                 <a:solidFill>
                   <a:srgbClr val="333333"/>
                 </a:solidFill>
                 <a:latin typeface="Calibri"/>
               </a:rPr>
-              <a:t>much of what is missing is re-adopt, not invent - BML WhoMeasuredType for measurements, 446 LOX task verbs, ROE / routes / resources already in the base standard.</a:t>
+              <a:t>the sub-group settled all three - autonomy is a role/facet on the existing Platform subtree (P1); the collective/Swarm derives from CollectiveEntity (P7); sensors are reworked on existing standards (P2). v0.0.4 carries P1's shape on the Vehicle side; P7 and the sensor rework are still to apply.</a:t>
             </a:r>
           </a:p>
           <a:p>
@@ -10775,26 +10836,26 @@
                 <a:spcPts val="200"/>
               </a:spcBef>
               <a:spcAft>
-                <a:spcPts val="1200"/>
+                <a:spcPts val="900"/>
               </a:spcAft>
             </a:pPr>
             <a:r>
-              <a:rPr sz="1450" b="1" i="0">
-                <a:solidFill>
-                  <a:srgbClr val="2E869A"/>
-                </a:solidFill>
-                <a:latin typeface="Calibri"/>
-              </a:rPr>
-              <a:t>•  The ask:  </a:t>
-            </a:r>
-            <a:r>
-              <a:rPr sz="1450" b="0" i="0">
+              <a:rPr sz="1350" b="1" i="0">
+                <a:solidFill>
+                  <a:srgbClr val="2E7D32"/>
+                </a:solidFill>
+                <a:latin typeface="Calibri"/>
+              </a:rPr>
+              <a:t>•  The good news:  </a:t>
+            </a:r>
+            <a:r>
+              <a:rPr sz="1350" b="0" i="0">
                 <a:solidFill>
                   <a:srgbClr val="333333"/>
                 </a:solidFill>
                 <a:latin typeface="Calibri"/>
               </a:rPr>
-              <a:t>24 concrete decisions (Q-A..Q-X, log sec 7) - settle the four structural ones (Q-A..Q-D) first; they unblock Initialization.</a:t>
+              <a:t>much of what is missing is re-adopt, not invent - BML WhoMeasuredType for measurements, 446 LOX task verbs, ROE / routes / resources already in the base standard.</a:t>
             </a:r>
           </a:p>
           <a:p>
@@ -10803,11 +10864,39 @@
                 <a:spcPts val="200"/>
               </a:spcBef>
               <a:spcAft>
-                <a:spcPts val="1200"/>
+                <a:spcPts val="900"/>
               </a:spcAft>
             </a:pPr>
             <a:r>
-              <a:rPr sz="1450" b="1" i="0">
+              <a:rPr sz="1350" b="1" i="0">
+                <a:solidFill>
+                  <a:srgbClr val="2E869A"/>
+                </a:solidFill>
+                <a:latin typeface="Calibri"/>
+              </a:rPr>
+              <a:t>•  The ask:  </a:t>
+            </a:r>
+            <a:r>
+              <a:rPr sz="1350" b="0" i="0">
+                <a:solidFill>
+                  <a:srgbClr val="333333"/>
+                </a:solidFill>
+                <a:latin typeface="Calibri"/>
+              </a:rPr>
+              <a:t>apply the three decided items in the OWL (P7, then P1, then the sensor survey), then the ~20 remaining content-type decisions (Q-E..Q-X, log sec 7).</a:t>
+            </a:r>
+          </a:p>
+          <a:p>
+            <a:pPr>
+              <a:spcBef>
+                <a:spcPts val="200"/>
+              </a:spcBef>
+              <a:spcAft>
+                <a:spcPts val="900"/>
+              </a:spcAft>
+            </a:pPr>
+            <a:r>
+              <a:rPr sz="1350" b="1" i="0">
                 <a:solidFill>
                   <a:srgbClr val="C87F0A"/>
                 </a:solidFill>
@@ -10816,7 +10905,7 @@
               <a:t>•  Status:  </a:t>
             </a:r>
             <a:r>
-              <a:rPr sz="1450" b="0" i="0">
+              <a:rPr sz="1350" b="0" i="0">
                 <a:solidFill>
                   <a:srgbClr val="333333"/>
                 </a:solidFill>
@@ -10865,7 +10954,7 @@
                 </a:solidFill>
                 <a:latin typeface="Calibri"/>
               </a:rPr>
-              <a:t>Group-Briefing.md is the one-page prose version of this slide</a:t>
+              <a:t>Group-Briefing.md is the one-page prose version of this slide  -  log sec 10 (v0.0.4 + the decisions)</a:t>
             </a:r>
           </a:p>
         </p:txBody>
@@ -10899,7 +10988,7 @@
                 </a:solidFill>
                 <a:latin typeface="Calibri"/>
               </a:rPr>
-              <a:t>C2SIM ASX Sub-group   |   Hyssos   |   July 2026</a:t>
+              <a:t>C2SIM ASX Sub-group   |   Hyssos   |   October 2026</a:t>
             </a:r>
           </a:p>
         </p:txBody>
@@ -11042,8 +11131,8 @@
         </p:nvSpPr>
         <p:spPr>
           <a:xfrm>
-            <a:off x="640080" y="1645920"/>
-            <a:ext cx="10972800" cy="4709160"/>
+            <a:off x="640080" y="1554480"/>
+            <a:ext cx="10972800" cy="4754880"/>
           </a:xfrm>
           <a:prstGeom prst="rect">
             <a:avLst/>
@@ -11061,17 +11150,17 @@
                 <a:spcPts val="200"/>
               </a:spcBef>
               <a:spcAft>
-                <a:spcPts val="1200"/>
+                <a:spcPts val="1000"/>
               </a:spcAft>
             </a:pPr>
             <a:r>
-              <a:rPr sz="1650" b="1" i="0">
+              <a:rPr sz="1500" b="1" i="0">
                 <a:solidFill>
                   <a:srgbClr val="333333"/>
                 </a:solidFill>
                 <a:latin typeface="Calibri"/>
               </a:rPr>
-              <a:t>•  Settle the two entity-typing decisions (Q-A, Q-B) - this unblocks Initialization.</a:t>
+              <a:t>•  Apply P7 in the OWL: re-parent (and re-spell) the collective class under CollectiveEntity - one axiom.</a:t>
             </a:r>
           </a:p>
           <a:p>
@@ -11080,17 +11169,17 @@
                 <a:spcPts val="200"/>
               </a:spcBef>
               <a:spcAft>
-                <a:spcPts val="1200"/>
+                <a:spcPts val="1000"/>
               </a:spcAft>
             </a:pPr>
             <a:r>
-              <a:rPr sz="1650" b="0" i="0">
+              <a:rPr sz="1500" b="1" i="0">
                 <a:solidFill>
                   <a:srgbClr val="333333"/>
                 </a:solidFill>
                 <a:latin typeface="Calibri"/>
               </a:rPr>
-              <a:t>•  Complete the Initialization instantiations (drafts provided for the 3 named scenarios).</a:t>
+              <a:t>•  Apply P1: retire the Robot/UAV/UGV tree, pick Vehicle-vs-Platform for the autonomy facet, re-parent the maritime pair, give the four floating v0.0.4 properties a domain.</a:t>
             </a:r>
           </a:p>
           <a:p>
@@ -11099,17 +11188,17 @@
                 <a:spcPts val="200"/>
               </a:spcBef>
               <a:spcAft>
-                <a:spcPts val="1200"/>
+                <a:spcPts val="1000"/>
               </a:spcAft>
             </a:pPr>
             <a:r>
-              <a:rPr sz="1650" b="0" i="0">
+              <a:rPr sz="1500" b="0" i="0">
                 <a:solidFill>
                   <a:srgbClr val="333333"/>
                 </a:solidFill>
                 <a:latin typeface="Calibri"/>
               </a:rPr>
-              <a:t>•  Add the two CASEVAC content types (Q-G robot-to-robot, Q-H rationale) - both are explicit scenario requirements.</a:t>
+              <a:t>•  Run the sensor standards survey (slice 6l, steps 1-2) and re-point hasSensorCapability / fill SensorTypeCode from it; settle Q-Y.</a:t>
             </a:r>
           </a:p>
           <a:p>
@@ -11118,17 +11207,17 @@
                 <a:spcPts val="200"/>
               </a:spcBef>
               <a:spcAft>
-                <a:spcPts val="1200"/>
+                <a:spcPts val="1000"/>
               </a:spcAft>
             </a:pPr>
             <a:r>
-              <a:rPr sz="1650" b="0" i="0">
+              <a:rPr sz="1500" b="0" i="0">
                 <a:solidFill>
                   <a:srgbClr val="333333"/>
                 </a:solidFill>
                 <a:latin typeface="Calibri"/>
               </a:rPr>
-              <a:t>•  Reconcile the OWL model with the June spreadsheet decisions; fix the typos.</a:t>
+              <a:t>•  Fix the typos while the classes are open (O1, O4, O5, O6); finish the attribute layer still marked x in the Concept Mapping (Payload, Mobility, Swarm Parameters).</a:t>
             </a:r>
           </a:p>
           <a:p>
@@ -11137,11 +11226,30 @@
                 <a:spcPts val="200"/>
               </a:spcBef>
               <a:spcAft>
-                <a:spcPts val="1200"/>
+                <a:spcPts val="1000"/>
               </a:spcAft>
             </a:pPr>
             <a:r>
-              <a:rPr sz="1650" b="0" i="0">
+              <a:rPr sz="1500" b="0" i="0">
+                <a:solidFill>
+                  <a:srgbClr val="333333"/>
+                </a:solidFill>
+                <a:latin typeface="Calibri"/>
+              </a:rPr>
+              <a:t>•  Then re-cut the Initialization tabs (the [!] P1/P2/P7 rows become real rows) and add the two CASEVAC content types (Q-G robot-to-robot, Q-H rationale).</a:t>
+            </a:r>
+          </a:p>
+          <a:p>
+            <a:pPr>
+              <a:spcBef>
+                <a:spcPts val="200"/>
+              </a:spcBef>
+              <a:spcAft>
+                <a:spcPts val="1000"/>
+              </a:spcAft>
+            </a:pPr>
+            <a:r>
+              <a:rPr sz="1500" b="0" i="0">
                 <a:solidFill>
                   <a:srgbClr val="333333"/>
                 </a:solidFill>
@@ -11190,7 +11298,7 @@
                 </a:solidFill>
                 <a:latin typeface="Calibri"/>
               </a:rPr>
-              <a:t>Group-Briefing.md ('Status and next step')  -  log sec 7 for the full decision register</a:t>
+              <a:t>Group-Briefing.md ('Status and next step')  -  log sec 10d (implementation order)  -  sec 7 for the full decision register</a:t>
             </a:r>
           </a:p>
         </p:txBody>
@@ -11224,7 +11332,7 @@
                 </a:solidFill>
                 <a:latin typeface="Calibri"/>
               </a:rPr>
-              <a:t>C2SIM ASX Sub-group   |   Hyssos   |   July 2026</a:t>
+              <a:t>C2SIM ASX Sub-group   |   Hyssos   |   October 2026</a:t>
             </a:r>
           </a:p>
         </p:txBody>
@@ -11587,7 +11695,7 @@
                           </a:solidFill>
                           <a:latin typeface="Calibri"/>
                         </a:rPr>
-                        <a:t>this deck - the speaker notes on each slide carry the talk track; the ask is the three Decisions slides, structure first (Q-A..Q-D)</a:t>
+                        <a:t>this deck - the speaker notes on each slide carry the talk track; the structural block (slides 8-11) is decided state + residual, the ask is the Decisions slides (Q-E..Q-X) and the next-steps order</a:t>
                       </a:r>
                     </a:p>
                   </a:txBody>
@@ -11834,7 +11942,7 @@
                 </a:solidFill>
                 <a:latin typeface="Calibri"/>
               </a:rPr>
-              <a:t>the log's evidence column cites the exact RDF entity (C2SIM / SMX / LOX / v0.0.3) - grep it; every claim was independently re-verified (log change log, 2026-07-12).</a:t>
+              <a:t>the log's evidence column cites the exact RDF entity (C2SIM / SMX / LOX / v0.0.3 / v0.0.4) - grep it; every claim was independently re-verified (log change log, 2026-07-12; v0.0.4 re-check 2026-10-14).</a:t>
             </a:r>
           </a:p>
         </p:txBody>
@@ -11868,7 +11976,7 @@
                 </a:solidFill>
                 <a:latin typeface="Calibri"/>
               </a:rPr>
-              <a:t>C2SIM ASX Sub-group   |   Hyssos   |   July 2026</a:t>
+              <a:t>C2SIM ASX Sub-group   |   Hyssos   |   October 2026</a:t>
             </a:r>
           </a:p>
         </p:txBody>
@@ -12047,7 +12155,7 @@
         </p:nvGraphicFramePr>
         <p:xfrm>
           <a:off x="640080" y="1463040"/>
-          <a:ext cx="10972800" cy="3872484"/>
+          <a:ext cx="10972800" cy="3950208"/>
         </p:xfrm>
         <a:graphic>
           <a:graphicData uri="http://schemas.openxmlformats.org/drawingml/2006/table">
@@ -12060,7 +12168,7 @@
                 <a:gridCol w="5303520"/>
                 <a:gridCol w="3931920"/>
               </a:tblGrid>
-              <a:tr h="352044">
+              <a:tr h="329184">
                 <a:tc>
                   <a:txBody>
                     <a:bodyPr wrap="square"/>
@@ -12128,14 +12236,14 @@
                   </a:tcPr>
                 </a:tc>
               </a:tr>
-              <a:tr h="352044">
+              <a:tr h="329184">
                 <a:tc>
                   <a:txBody>
                     <a:bodyPr wrap="square"/>
                     <a:lstStyle/>
                     <a:p>
                       <a:r>
-                        <a:rPr sz="1150" b="0" i="0">
+                        <a:rPr sz="1100" b="0" i="0">
                           <a:solidFill>
                             <a:srgbClr val="333333"/>
                           </a:solidFill>
@@ -12157,13 +12265,13 @@
                     <a:lstStyle/>
                     <a:p>
                       <a:r>
-                        <a:rPr sz="1150" b="0" i="0">
+                        <a:rPr sz="1100" b="0" i="0">
                           <a:solidFill>
                             <a:srgbClr val="333333"/>
                           </a:solidFill>
                           <a:latin typeface="Calibri"/>
                         </a:rPr>
-                        <a:t>entity-typing findings: UAV (P1), sensor (P2), swarm (P7)</a:t>
+                        <a:t>entity-typing findings: UAV (P1), sensor (P2), swarm (P7) - all three decided 2026-10</a:t>
                       </a:r>
                     </a:p>
                   </a:txBody>
@@ -12179,13 +12287,13 @@
                     <a:lstStyle/>
                     <a:p>
                       <a:r>
-                        <a:rPr sz="1150" b="0" i="0">
+                        <a:rPr sz="1100" b="0" i="0">
                           <a:solidFill>
                             <a:srgbClr val="333333"/>
                           </a:solidFill>
                           <a:latin typeface="Calibri"/>
                         </a:rPr>
-                        <a:t>log sec 5; Initialization-Walk.md</a:t>
+                        <a:t>log sec 5 + sec 10; Initialization-Walk.md</a:t>
                       </a:r>
                     </a:p>
                   </a:txBody>
@@ -12196,14 +12304,14 @@
                   </a:tcPr>
                 </a:tc>
               </a:tr>
-              <a:tr h="352044">
+              <a:tr h="329184">
                 <a:tc>
                   <a:txBody>
                     <a:bodyPr wrap="square"/>
                     <a:lstStyle/>
                     <a:p>
                       <a:r>
-                        <a:rPr sz="1150" b="0" i="0">
+                        <a:rPr sz="1100" b="0" i="0">
                           <a:solidFill>
                             <a:srgbClr val="333333"/>
                           </a:solidFill>
@@ -12225,7 +12333,7 @@
                     <a:lstStyle/>
                     <a:p>
                       <a:r>
-                        <a:rPr sz="1150" b="0" i="0">
+                        <a:rPr sz="1100" b="0" i="0">
                           <a:solidFill>
                             <a:srgbClr val="333333"/>
                           </a:solidFill>
@@ -12247,7 +12355,7 @@
                     <a:lstStyle/>
                     <a:p>
                       <a:r>
-                        <a:rPr sz="1150" b="0" i="0">
+                        <a:rPr sz="1100" b="0" i="0">
                           <a:solidFill>
                             <a:srgbClr val="333333"/>
                           </a:solidFill>
@@ -12264,14 +12372,14 @@
                   </a:tcPr>
                 </a:tc>
               </a:tr>
-              <a:tr h="352044">
+              <a:tr h="329184">
                 <a:tc>
                   <a:txBody>
                     <a:bodyPr wrap="square"/>
                     <a:lstStyle/>
                     <a:p>
                       <a:r>
-                        <a:rPr sz="1150" b="0" i="0">
+                        <a:rPr sz="1100" b="0" i="0">
                           <a:solidFill>
                             <a:srgbClr val="333333"/>
                           </a:solidFill>
@@ -12293,7 +12401,7 @@
                     <a:lstStyle/>
                     <a:p>
                       <a:r>
-                        <a:rPr sz="1150" b="0" i="0">
+                        <a:rPr sz="1100" b="0" i="0">
                           <a:solidFill>
                             <a:srgbClr val="333333"/>
                           </a:solidFill>
@@ -12315,7 +12423,7 @@
                     <a:lstStyle/>
                     <a:p>
                       <a:r>
-                        <a:rPr sz="1150" b="0" i="0">
+                        <a:rPr sz="1100" b="0" i="0">
                           <a:solidFill>
                             <a:srgbClr val="333333"/>
                           </a:solidFill>
@@ -12332,14 +12440,14 @@
                   </a:tcPr>
                 </a:tc>
               </a:tr>
-              <a:tr h="352044">
+              <a:tr h="329184">
                 <a:tc>
                   <a:txBody>
                     <a:bodyPr wrap="square"/>
                     <a:lstStyle/>
                     <a:p>
                       <a:r>
-                        <a:rPr sz="1150" b="0" i="0">
+                        <a:rPr sz="1100" b="0" i="0">
                           <a:solidFill>
                             <a:srgbClr val="333333"/>
                           </a:solidFill>
@@ -12361,7 +12469,7 @@
                     <a:lstStyle/>
                     <a:p>
                       <a:r>
-                        <a:rPr sz="1150" b="0" i="0">
+                        <a:rPr sz="1100" b="0" i="0">
                           <a:solidFill>
                             <a:srgbClr val="333333"/>
                           </a:solidFill>
@@ -12383,7 +12491,7 @@
                     <a:lstStyle/>
                     <a:p>
                       <a:r>
-                        <a:rPr sz="1150" b="0" i="0">
+                        <a:rPr sz="1100" b="0" i="0">
                           <a:solidFill>
                             <a:srgbClr val="333333"/>
                           </a:solidFill>
@@ -12400,14 +12508,14 @@
                   </a:tcPr>
                 </a:tc>
               </a:tr>
-              <a:tr h="352044">
+              <a:tr h="329184">
                 <a:tc>
                   <a:txBody>
                     <a:bodyPr wrap="square"/>
                     <a:lstStyle/>
                     <a:p>
                       <a:r>
-                        <a:rPr sz="1150" b="0" i="0">
+                        <a:rPr sz="1100" b="0" i="0">
                           <a:solidFill>
                             <a:srgbClr val="333333"/>
                           </a:solidFill>
@@ -12429,7 +12537,7 @@
                     <a:lstStyle/>
                     <a:p>
                       <a:r>
-                        <a:rPr sz="1150" b="0" i="0">
+                        <a:rPr sz="1100" b="0" i="0">
                           <a:solidFill>
                             <a:srgbClr val="333333"/>
                           </a:solidFill>
@@ -12451,7 +12559,7 @@
                     <a:lstStyle/>
                     <a:p>
                       <a:r>
-                        <a:rPr sz="1150" b="0" i="0">
+                        <a:rPr sz="1100" b="0" i="0">
                           <a:solidFill>
                             <a:srgbClr val="333333"/>
                           </a:solidFill>
@@ -12468,14 +12576,14 @@
                   </a:tcPr>
                 </a:tc>
               </a:tr>
-              <a:tr h="352044">
+              <a:tr h="329184">
                 <a:tc>
                   <a:txBody>
                     <a:bodyPr wrap="square"/>
                     <a:lstStyle/>
                     <a:p>
                       <a:r>
-                        <a:rPr sz="1150" b="0" i="0">
+                        <a:rPr sz="1100" b="0" i="0">
                           <a:solidFill>
                             <a:srgbClr val="333333"/>
                           </a:solidFill>
@@ -12497,7 +12605,7 @@
                     <a:lstStyle/>
                     <a:p>
                       <a:r>
-                        <a:rPr sz="1150" b="0" i="0">
+                        <a:rPr sz="1100" b="0" i="0">
                           <a:solidFill>
                             <a:srgbClr val="333333"/>
                           </a:solidFill>
@@ -12519,7 +12627,7 @@
                     <a:lstStyle/>
                     <a:p>
                       <a:r>
-                        <a:rPr sz="1150" b="0" i="0">
+                        <a:rPr sz="1100" b="0" i="0">
                           <a:solidFill>
                             <a:srgbClr val="333333"/>
                           </a:solidFill>
@@ -12536,14 +12644,14 @@
                   </a:tcPr>
                 </a:tc>
               </a:tr>
-              <a:tr h="352044">
+              <a:tr h="329184">
                 <a:tc>
                   <a:txBody>
                     <a:bodyPr wrap="square"/>
                     <a:lstStyle/>
                     <a:p>
                       <a:r>
-                        <a:rPr sz="1150" b="0" i="0">
+                        <a:rPr sz="1100" b="0" i="0">
                           <a:solidFill>
                             <a:srgbClr val="333333"/>
                           </a:solidFill>
@@ -12565,7 +12673,7 @@
                     <a:lstStyle/>
                     <a:p>
                       <a:r>
-                        <a:rPr sz="1150" b="0" i="0">
+                        <a:rPr sz="1100" b="0" i="0">
                           <a:solidFill>
                             <a:srgbClr val="333333"/>
                           </a:solidFill>
@@ -12587,7 +12695,7 @@
                     <a:lstStyle/>
                     <a:p>
                       <a:r>
-                        <a:rPr sz="1150" b="0" i="0">
+                        <a:rPr sz="1100" b="0" i="0">
                           <a:solidFill>
                             <a:srgbClr val="333333"/>
                           </a:solidFill>
@@ -12604,14 +12712,14 @@
                   </a:tcPr>
                 </a:tc>
               </a:tr>
-              <a:tr h="352044">
+              <a:tr h="329184">
                 <a:tc>
                   <a:txBody>
                     <a:bodyPr wrap="square"/>
                     <a:lstStyle/>
                     <a:p>
                       <a:r>
-                        <a:rPr sz="1150" b="0" i="0">
+                        <a:rPr sz="1100" b="0" i="0">
                           <a:solidFill>
                             <a:srgbClr val="333333"/>
                           </a:solidFill>
@@ -12633,7 +12741,7 @@
                     <a:lstStyle/>
                     <a:p>
                       <a:r>
-                        <a:rPr sz="1150" b="0" i="0">
+                        <a:rPr sz="1100" b="0" i="0">
                           <a:solidFill>
                             <a:srgbClr val="333333"/>
                           </a:solidFill>
@@ -12655,7 +12763,7 @@
                     <a:lstStyle/>
                     <a:p>
                       <a:r>
-                        <a:rPr sz="1150" b="0" i="0">
+                        <a:rPr sz="1100" b="0" i="0">
                           <a:solidFill>
                             <a:srgbClr val="333333"/>
                           </a:solidFill>
@@ -12672,14 +12780,14 @@
                   </a:tcPr>
                 </a:tc>
               </a:tr>
-              <a:tr h="352044">
+              <a:tr h="329184">
                 <a:tc>
                   <a:txBody>
                     <a:bodyPr wrap="square"/>
                     <a:lstStyle/>
                     <a:p>
                       <a:r>
-                        <a:rPr sz="1150" b="0" i="0">
+                        <a:rPr sz="1100" b="0" i="0">
                           <a:solidFill>
                             <a:srgbClr val="333333"/>
                           </a:solidFill>
@@ -12701,7 +12809,7 @@
                     <a:lstStyle/>
                     <a:p>
                       <a:r>
-                        <a:rPr sz="1150" b="0" i="0">
+                        <a:rPr sz="1100" b="0" i="0">
                           <a:solidFill>
                             <a:srgbClr val="333333"/>
                           </a:solidFill>
@@ -12723,7 +12831,7 @@
                     <a:lstStyle/>
                     <a:p>
                       <a:r>
-                        <a:rPr sz="1150" b="0" i="0">
+                        <a:rPr sz="1100" b="0" i="0">
                           <a:solidFill>
                             <a:srgbClr val="333333"/>
                           </a:solidFill>
@@ -12740,14 +12848,14 @@
                   </a:tcPr>
                 </a:tc>
               </a:tr>
-              <a:tr h="352044">
+              <a:tr h="329184">
                 <a:tc>
                   <a:txBody>
                     <a:bodyPr wrap="square"/>
                     <a:lstStyle/>
                     <a:p>
                       <a:r>
-                        <a:rPr sz="1150" b="0" i="0">
+                        <a:rPr sz="1100" b="0" i="0">
                           <a:solidFill>
                             <a:srgbClr val="333333"/>
                           </a:solidFill>
@@ -12769,13 +12877,13 @@
                     <a:lstStyle/>
                     <a:p>
                       <a:r>
-                        <a:rPr sz="1150" b="0" i="0">
+                        <a:rPr sz="1100" b="0" i="0">
                           <a:solidFill>
                             <a:srgbClr val="333333"/>
                           </a:solidFill>
                           <a:latin typeface="Calibri"/>
                         </a:rPr>
-                        <a:t>the 24 decisions this review puts to the group</a:t>
+                        <a:t>the 24 decisions this review puts to the group (Q-A..Q-C decided)</a:t>
                       </a:r>
                     </a:p>
                   </a:txBody>
@@ -12791,13 +12899,13 @@
                     <a:lstStyle/>
                     <a:p>
                       <a:r>
-                        <a:rPr sz="1150" b="0" i="0">
+                        <a:rPr sz="1100" b="0" i="0">
                           <a:solidFill>
                             <a:srgbClr val="333333"/>
                           </a:solidFill>
                           <a:latin typeface="Calibri"/>
                         </a:rPr>
-                        <a:t>log sec 7 - full text + what each resolves</a:t>
+                        <a:t>log sec 7 - full text + what each resolves; sec 10 - the decisions</a:t>
                       </a:r>
                     </a:p>
                   </a:txBody>
@@ -12808,6 +12916,74 @@
                   </a:tcPr>
                 </a:tc>
               </a:tr>
+              <a:tr h="329184">
+                <a:tc>
+                  <a:txBody>
+                    <a:bodyPr wrap="square"/>
+                    <a:lstStyle/>
+                    <a:p>
+                      <a:r>
+                        <a:rPr sz="1100" b="0" i="0">
+                          <a:solidFill>
+                            <a:srgbClr val="333333"/>
+                          </a:solidFill>
+                          <a:latin typeface="Calibri"/>
+                        </a:rPr>
+                        <a:t>V</a:t>
+                      </a:r>
+                    </a:p>
+                  </a:txBody>
+                  <a:tcPr marT="18288" marB="18288" marL="54864" marR="54864">
+                    <a:solidFill>
+                      <a:srgbClr val="FFFFFF"/>
+                    </a:solidFill>
+                  </a:tcPr>
+                </a:tc>
+                <a:tc>
+                  <a:txBody>
+                    <a:bodyPr wrap="square"/>
+                    <a:lstStyle/>
+                    <a:p>
+                      <a:r>
+                        <a:rPr sz="1100" b="0" i="0">
+                          <a:solidFill>
+                            <a:srgbClr val="333333"/>
+                          </a:solidFill>
+                          <a:latin typeface="Calibri"/>
+                        </a:rPr>
+                        <a:t>v0.0.3 / v0.0.4 model observations (V1 maritime parenting, V2 floating properties, ...)</a:t>
+                      </a:r>
+                    </a:p>
+                  </a:txBody>
+                  <a:tcPr marT="18288" marB="18288" marL="54864" marR="54864">
+                    <a:solidFill>
+                      <a:srgbClr val="FFFFFF"/>
+                    </a:solidFill>
+                  </a:tcPr>
+                </a:tc>
+                <a:tc>
+                  <a:txBody>
+                    <a:bodyPr wrap="square"/>
+                    <a:lstStyle/>
+                    <a:p>
+                      <a:r>
+                        <a:rPr sz="1100" b="0" i="0">
+                          <a:solidFill>
+                            <a:srgbClr val="333333"/>
+                          </a:solidFill>
+                          <a:latin typeface="Calibri"/>
+                        </a:rPr>
+                        <a:t>log secs 9-10</a:t>
+                      </a:r>
+                    </a:p>
+                  </a:txBody>
+                  <a:tcPr marT="18288" marB="18288" marL="54864" marR="54864">
+                    <a:solidFill>
+                      <a:srgbClr val="FFFFFF"/>
+                    </a:solidFill>
+                  </a:tcPr>
+                </a:tc>
+              </a:tr>
             </a:tbl>
           </a:graphicData>
         </a:graphic>
@@ -12883,7 +13059,7 @@
                 </a:solidFill>
                 <a:latin typeface="Calibri"/>
               </a:rPr>
-              <a:t>C2SIM ASX Sub-group   |   Hyssos   |   July 2026</a:t>
+              <a:t>C2SIM ASX Sub-group   |   Hyssos   |   October 2026</a:t>
             </a:r>
           </a:p>
         </p:txBody>
@@ -13098,7 +13274,7 @@
                 </a:solidFill>
                 <a:latin typeface="Calibri"/>
               </a:rPr>
-              <a:t>Issues-And-Comments-Log.md - every finding, the 24 decisions (sec 7), v0.0.3 reconciliation (sec 9), why gaps remain (sec 8).</a:t>
+              <a:t>Issues-And-Comments-Log.md - every finding, the 24 decisions (sec 7), v0.0.3 reconciliation (sec 9), v0.0.4 + the P1/P2/P7 decisions and the implementation order (sec 10), why gaps remain (sec 8).</a:t>
             </a:r>
           </a:p>
           <a:p>
@@ -13173,7 +13349,7 @@
                 </a:solidFill>
                 <a:latin typeface="Calibri"/>
               </a:rPr>
-              <a:t>•  Initialization &amp; entity typing (P1/P2/P7):  </a:t>
+              <a:t>•  Initialization &amp; entity typing (P1/P2/P7, decided):  </a:t>
             </a:r>
             <a:r>
               <a:rPr sz="1200" b="0" i="0">
@@ -13182,7 +13358,7 @@
                 </a:solidFill>
                 <a:latin typeface="Calibri"/>
               </a:rPr>
-              <a:t>Initialization-Walk.md; log sec 5.</a:t>
+              <a:t>Initialization-Walk.md; log sec 5 + sec 10; Sensor-Characterization-Slice.md for the P2 rework.</a:t>
             </a:r>
           </a:p>
           <a:p>
@@ -13356,7 +13532,7 @@
                 </a:solidFill>
                 <a:latin typeface="Calibri"/>
               </a:rPr>
-              <a:t>C2SIM ASX Sub-group   |   Hyssos   |   July 2026</a:t>
+              <a:t>C2SIM ASX Sub-group   |   Hyssos   |   October 2026</a:t>
             </a:r>
           </a:p>
         </p:txBody>
@@ -13939,7 +14115,7 @@
                 </a:solidFill>
                 <a:latin typeface="Calibri"/>
               </a:rPr>
-              <a:t>C2SIM ASX Sub-group   |   Hyssos   |   July 2026</a:t>
+              <a:t>C2SIM ASX Sub-group   |   Hyssos   |   October 2026</a:t>
             </a:r>
           </a:p>
         </p:txBody>
@@ -14229,7 +14405,7 @@
                 </a:solidFill>
                 <a:latin typeface="Calibri"/>
               </a:rPr>
-              <a:t>•  4  v0.0.3 reconciliation:  </a:t>
+              <a:t>•  4  v0.0.3 / v0.0.4 reconciliation:  </a:t>
             </a:r>
             <a:r>
               <a:rPr sz="1450" b="0" i="0">
@@ -14238,7 +14414,7 @@
                 </a:solidFill>
                 <a:latin typeface="Calibri"/>
               </a:rPr>
-              <a:t>how each finding moves against Michael's update - what it adopts, what it makes concrete, what remains - plus coordination notes (two ASX files, import layering).</a:t>
+              <a:t>how each finding moves against Michael's updates (log secs 9-10) - what they adopt, what they make concrete, what remains - and what the group's P1 / P7 / P2 decisions change (which findings close, the implementation order).</a:t>
             </a:r>
           </a:p>
           <a:p>
@@ -14343,7 +14519,7 @@
                 </a:solidFill>
                 <a:latin typeface="Calibri"/>
               </a:rPr>
-              <a:t>C2SIM ASX Sub-group   |   Hyssos   |   July 2026</a:t>
+              <a:t>C2SIM ASX Sub-group   |   Hyssos   |   October 2026</a:t>
             </a:r>
           </a:p>
         </p:txBody>
@@ -14721,7 +14897,7 @@
                 </a:solidFill>
                 <a:latin typeface="Calibri"/>
               </a:rPr>
-              <a:t>C2SIM ASX Sub-group   |   Hyssos   |   July 2026</a:t>
+              <a:t>C2SIM ASX Sub-group   |   Hyssos   |   October 2026</a:t>
             </a:r>
           </a:p>
         </p:txBody>
@@ -15165,7 +15341,7 @@
                 </a:solidFill>
                 <a:latin typeface="Calibri"/>
               </a:rPr>
-              <a:t>C2SIM ASX Sub-group   |   Hyssos   |   July 2026</a:t>
+              <a:t>C2SIM ASX Sub-group   |   Hyssos   |   October 2026</a:t>
             </a:r>
           </a:p>
         </p:txBody>
@@ -15329,7 +15505,7 @@
                 </a:solidFill>
                 <a:latin typeface="Calibri"/>
               </a:rPr>
-              <a:t>Two tracks, one early model - moving, with a known catch-up list</a:t>
+              <a:t>Two tracks converging on one early model - moving, with a known catch-up list</a:t>
             </a:r>
           </a:p>
         </p:txBody>
@@ -15343,7 +15519,7 @@
         <p:spPr>
           <a:xfrm>
             <a:off x="640080" y="1600200"/>
-            <a:ext cx="3383280" cy="1234440"/>
+            <a:ext cx="2560320" cy="1325880"/>
           </a:xfrm>
           <a:prstGeom prst="roundRect">
             <a:avLst/>
@@ -15375,15 +15551,15 @@
           <a:p>
             <a:pPr algn="ctr"/>
             <a:r>
-              <a:rPr sz="1200" b="1" i="0">
+              <a:rPr sz="1100" b="1" i="0">
                 <a:solidFill>
                   <a:srgbClr val="FFFFFF"/>
                 </a:solidFill>
                 <a:latin typeface="Calibri"/>
               </a:rPr>
               <a:t>OWL v0.0.1  (Jan 2026)
-15 classes, 1 object property,
-0 datatype properties</a:t>
+15 classes, 1 object prop,
+0 datatype props</a:t>
             </a:r>
           </a:p>
         </p:txBody>
@@ -15396,8 +15572,8 @@
         </p:nvSpPr>
         <p:spPr>
           <a:xfrm>
-            <a:off x="4389120" y="1600200"/>
-            <a:ext cx="3383280" cy="1234440"/>
+            <a:off x="3520440" y="1600200"/>
+            <a:ext cx="2560320" cy="1325880"/>
           </a:xfrm>
           <a:prstGeom prst="roundRect">
             <a:avLst/>
@@ -15429,13 +15605,13 @@
           <a:p>
             <a:pPr algn="ctr"/>
             <a:r>
-              <a:rPr sz="1200" b="1" i="0">
+              <a:rPr sz="1100" b="1" i="0">
                 <a:solidFill>
                   <a:srgbClr val="FFFFFF"/>
                 </a:solidFill>
                 <a:latin typeface="Calibri"/>
               </a:rPr>
-              <a:t>Spreadsheets  (Feb-Jun 2026)
+              <a:t>Spreadsheets  (Feb-Jun)
 the attribute layer: Payload,
 Mobility, VehicleType, ...</a:t>
             </a:r>
@@ -15450,8 +15626,8 @@
         </p:nvSpPr>
         <p:spPr>
           <a:xfrm>
-            <a:off x="8138160" y="1600200"/>
-            <a:ext cx="3383280" cy="1234440"/>
+            <a:off x="6400800" y="1600200"/>
+            <a:ext cx="2560320" cy="1325880"/>
           </a:xfrm>
           <a:prstGeom prst="roundRect">
             <a:avLst/>
@@ -15483,29 +15659,83 @@
           <a:p>
             <a:pPr algn="ctr"/>
             <a:r>
-              <a:rPr sz="1200" b="1" i="0">
+              <a:rPr sz="1100" b="1" i="0">
                 <a:solidFill>
                   <a:srgbClr val="FFFFFF"/>
                 </a:solidFill>
                 <a:latin typeface="Calibri"/>
               </a:rPr>
-              <a:t>OWL v0.0.3  (Jul 2026, Michael)
-first datatype properties, Video
+              <a:t>OWL v0.0.3  (Jul, Michael)
+first datatype props, Video
 Detection Report, AutonomyLevelCode</a:t>
+            </a:r>
+          </a:p>
+        </p:txBody>
+      </p:sp>
+      <p:sp>
+        <p:nvSpPr>
+          <p:cNvPr id="8" name="Rounded Rectangle 7"/>
+          <p:cNvSpPr/>
+          <p:nvPr/>
+        </p:nvSpPr>
+        <p:spPr>
+          <a:xfrm>
+            <a:off x="9281160" y="1600200"/>
+            <a:ext cx="2560320" cy="1325880"/>
+          </a:xfrm>
+          <a:prstGeom prst="roundRect">
+            <a:avLst/>
+          </a:prstGeom>
+          <a:solidFill>
+            <a:srgbClr val="2E7D32"/>
+          </a:solidFill>
+          <a:ln>
+            <a:noFill/>
+          </a:ln>
+        </p:spPr>
+        <p:style>
+          <a:lnRef idx="1">
+            <a:schemeClr val="accent1"/>
+          </a:lnRef>
+          <a:fillRef idx="3">
+            <a:schemeClr val="accent1"/>
+          </a:fillRef>
+          <a:effectRef idx="2">
+            <a:schemeClr val="accent1"/>
+          </a:effectRef>
+          <a:fontRef idx="minor">
+            <a:schemeClr val="lt1"/>
+          </a:fontRef>
+        </p:style>
+        <p:txBody>
+          <a:bodyPr rtlCol="0" anchor="ctr" wrap="square"/>
+          <a:lstStyle/>
+          <a:p>
+            <a:pPr algn="ctr"/>
+            <a:r>
+              <a:rPr sz="1100" b="1" i="0">
+                <a:solidFill>
+                  <a:srgbClr val="FFFFFF"/>
+                </a:solidFill>
+                <a:latin typeface="Calibri"/>
+              </a:rPr>
+              <a:t>OWL v0.0.4  (Aug, Michael)
+5 spreadsheet attributes in; autonomy
+facet on Vehicle; per-task level</a:t>
             </a:r>
           </a:p>
         </p:txBody>
       </p:sp>
       <p:cxnSp>
         <p:nvCxnSpPr>
-          <p:cNvPr id="8" name="Connector 7"/>
+          <p:cNvPr id="9" name="Connector 8"/>
           <p:cNvCxnSpPr/>
           <p:nvPr/>
         </p:nvCxnSpPr>
         <p:spPr>
           <a:xfrm>
-            <a:off x="4023360" y="2194560"/>
-            <a:ext cx="365760" cy="0"/>
+            <a:off x="3200400" y="2240280"/>
+            <a:ext cx="320040" cy="0"/>
           </a:xfrm>
           <a:prstGeom prst="line">
             <a:avLst/>
@@ -15533,14 +15763,14 @@
       </p:cxnSp>
       <p:cxnSp>
         <p:nvCxnSpPr>
-          <p:cNvPr id="9" name="Connector 8"/>
+          <p:cNvPr id="10" name="Connector 9"/>
           <p:cNvCxnSpPr/>
           <p:nvPr/>
         </p:nvCxnSpPr>
         <p:spPr>
           <a:xfrm>
-            <a:off x="7772400" y="2194560"/>
-            <a:ext cx="365760" cy="0"/>
+            <a:off x="6080760" y="2240280"/>
+            <a:ext cx="320040" cy="0"/>
           </a:xfrm>
           <a:prstGeom prst="line">
             <a:avLst/>
@@ -15566,16 +15796,51 @@
           </a:fontRef>
         </p:style>
       </p:cxnSp>
-      <p:sp>
-        <p:nvSpPr>
-          <p:cNvPr id="10" name="TextBox 9"/>
+      <p:cxnSp>
+        <p:nvCxnSpPr>
+          <p:cNvPr id="11" name="Connector 10"/>
+          <p:cNvCxnSpPr/>
+          <p:nvPr/>
+        </p:nvCxnSpPr>
+        <p:spPr>
+          <a:xfrm>
+            <a:off x="8961120" y="2240280"/>
+            <a:ext cx="320040" cy="0"/>
+          </a:xfrm>
+          <a:prstGeom prst="line">
+            <a:avLst/>
+          </a:prstGeom>
+          <a:ln w="19050">
+            <a:solidFill>
+              <a:srgbClr val="2E7D32"/>
+            </a:solidFill>
+          </a:ln>
+        </p:spPr>
+        <p:style>
+          <a:lnRef idx="2">
+            <a:schemeClr val="accent1"/>
+          </a:lnRef>
+          <a:fillRef idx="0">
+            <a:schemeClr val="accent1"/>
+          </a:fillRef>
+          <a:effectRef idx="1">
+            <a:schemeClr val="accent1"/>
+          </a:effectRef>
+          <a:fontRef idx="minor">
+            <a:schemeClr val="tx1"/>
+          </a:fontRef>
+        </p:style>
+      </p:cxnSp>
+      <p:sp>
+        <p:nvSpPr>
+          <p:cNvPr id="12" name="TextBox 11"/>
           <p:cNvSpPr txBox="1"/>
           <p:nvPr/>
         </p:nvSpPr>
         <p:spPr>
           <a:xfrm>
-            <a:off x="640080" y="3063240"/>
-            <a:ext cx="10972800" cy="3291840"/>
+            <a:off x="640080" y="3108960"/>
+            <a:ext cx="10972800" cy="3246120"/>
           </a:xfrm>
           <a:prstGeom prst="rect">
             <a:avLst/>
@@ -15593,11 +15858,11 @@
                 <a:spcPts val="200"/>
               </a:spcBef>
               <a:spcAft>
-                <a:spcPts val="800"/>
+                <a:spcPts val="700"/>
               </a:spcAft>
             </a:pPr>
             <a:r>
-              <a:rPr sz="1300" b="1" i="0">
+              <a:rPr sz="1250" b="1" i="0">
                 <a:solidFill>
                   <a:srgbClr val="2E7D32"/>
                 </a:solidFill>
@@ -15606,13 +15871,13 @@
               <a:t>•  Outlook:  </a:t>
             </a:r>
             <a:r>
-              <a:rPr sz="1300" b="0" i="0">
+              <a:rPr sz="1250" b="0" i="0">
                 <a:solidFill>
                   <a:srgbClr val="333333"/>
                 </a:solidFill>
                 <a:latin typeface="Calibri"/>
               </a:rPr>
-              <a:t>an early (v0.0.x) model whose two tracks evolved separately for ~5 months - expected at this stage. v0.0.3 shows the OWL moving, and puts the key typing choice (P1) concretely in the model to settle.</a:t>
+              <a:t>an early (v0.0.x) model whose two tracks evolved separately for ~5 months - expected. v0.0.3 put the key typing choice (P1) concretely in the model; v0.0.4 starts reconciling from the OWL side (the Concept Mapping now tracks per attribute what is done in 0.0.4) and fixes July's circular import.</a:t>
             </a:r>
           </a:p>
           <a:p>
@@ -15621,11 +15886,11 @@
                 <a:spcPts val="200"/>
               </a:spcBef>
               <a:spcAft>
-                <a:spcPts val="800"/>
+                <a:spcPts val="700"/>
               </a:spcAft>
             </a:pPr>
             <a:r>
-              <a:rPr sz="1300" b="1" i="0">
+              <a:rPr sz="1250" b="1" i="0">
                 <a:solidFill>
                   <a:srgbClr val="C87F0A"/>
                 </a:solidFill>
@@ -15634,13 +15899,13 @@
               <a:t>•  Catching up - attribute layer:  </a:t>
             </a:r>
             <a:r>
-              <a:rPr sz="1300" b="0" i="0">
+              <a:rPr sz="1250" b="0" i="0">
                 <a:solidFill>
                   <a:srgbClr val="333333"/>
                 </a:solidFill>
                 <a:latin typeface="Calibri"/>
               </a:rPr>
-              <a:t>Payload, PayloadCapability, Mobility/Propulsion, VehicleType, PassengerCapability, mission/swarm parameters are in the spreadsheets, not yet in the OWL (D3); v0.0.3 begins the layer, for the Video Detection Report only.</a:t>
+              <a:t>v0.0.4 brings in Control Mode, SensorCapability, AutonomousMissionFunction, Autonomous Parameters, PassengerCapability + three empty code lists (SensorType / VehicleType / AlgorithmType); still absent: Payload, PayloadCapability, Mobility/Propulsion, Swarm Parameters (D3).</a:t>
             </a:r>
           </a:p>
           <a:p>
@@ -15649,26 +15914,26 @@
                 <a:spcPts val="200"/>
               </a:spcBef>
               <a:spcAft>
-                <a:spcPts val="800"/>
+                <a:spcPts val="700"/>
               </a:spcAft>
             </a:pPr>
             <a:r>
-              <a:rPr sz="1300" b="1" i="0">
-                <a:solidFill>
-                  <a:srgbClr val="C87F0A"/>
-                </a:solidFill>
-                <a:latin typeface="Calibri"/>
-              </a:rPr>
-              <a:t>•  Catching up - one autonomy vocabulary:  </a:t>
-            </a:r>
-            <a:r>
-              <a:rPr sz="1300" b="0" i="0">
+              <a:rPr sz="1250" b="1" i="0">
+                <a:solidFill>
+                  <a:srgbClr val="2E7D32"/>
+                </a:solidFill>
+                <a:latin typeface="Calibri"/>
+              </a:rPr>
+              <a:t>•  Nearly done - one autonomy vocabulary:  </a:t>
+            </a:r>
+            <a:r>
+              <a:rPr sz="1250" b="0" i="0">
                 <a:solidFill>
                   <a:srgbClr val="333333"/>
                 </a:solidFill>
                 <a:latin typeface="Calibri"/>
               </a:rPr>
-              <a:t>three today - OWL {Automated, FullAuto, ReCont, Teleop} vs ControlMode {Piloted, Unpiloted-Autonomous, Swarm} vs NavigationAutonomy {FPV, Autonomous, RemoteControl} (D1 -&gt; Q-D).</a:t>
+              <a:t>v0.0.4 values both hasControlMode (on smx#Vehicle) and hasAutonomyLevelCode (on Task) from the OWL's AutonomyLevelCode; the workbook marks NavigationAutonomy as covered - Q-D only needs stating (D1).</a:t>
             </a:r>
           </a:p>
           <a:p>
@@ -15677,11 +15942,11 @@
                 <a:spcPts val="200"/>
               </a:spcBef>
               <a:spcAft>
-                <a:spcPts val="800"/>
+                <a:spcPts val="700"/>
               </a:spcAft>
             </a:pPr>
             <a:r>
-              <a:rPr sz="1300" b="1" i="0">
+              <a:rPr sz="1250" b="1" i="0">
                 <a:solidFill>
                   <a:srgbClr val="C87F0A"/>
                 </a:solidFill>
@@ -15690,13 +15955,13 @@
               <a:t>•  Catching up - one sensor model:  </a:t>
             </a:r>
             <a:r>
-              <a:rPr sz="1300" b="0" i="0">
+              <a:rPr sz="1250" b="0" i="0">
                 <a:solidFill>
                   <a:srgbClr val="333333"/>
                 </a:solidFill>
                 <a:latin typeface="Calibri"/>
               </a:rPr>
-              <a:t>three today - Sensor class vs SensorType enum vs SensorCapability equipment (D2 -&gt; Q-C); this is structural decision P2, next section.</a:t>
+              <a:t>still three - Sensor class vs SensorType enum vs SensorCapability equipment (D2); v0.0.4 adds placeholders only (empty SensorTypeCode; hasSensorCapability typed by media format). Direction now decided: P2, next section.</a:t>
             </a:r>
           </a:p>
           <a:p>
@@ -15705,11 +15970,11 @@
                 <a:spcPts val="200"/>
               </a:spcBef>
               <a:spcAft>
-                <a:spcPts val="800"/>
+                <a:spcPts val="700"/>
               </a:spcAft>
             </a:pPr>
             <a:r>
-              <a:rPr sz="1300" b="1" i="0">
+              <a:rPr sz="1250" b="1" i="0">
                 <a:solidFill>
                   <a:srgbClr val="666666"/>
                 </a:solidFill>
@@ -15718,20 +15983,20 @@
               <a:t>•  Wiring to settle deliberately:  </a:t>
             </a:r>
             <a:r>
-              <a:rPr sz="1300" b="0" i="0">
+              <a:rPr sz="1250" b="0" i="0">
                 <a:solidFill>
                   <a:srgbClr val="333333"/>
                 </a:solidFill>
                 <a:latin typeface="Calibri"/>
               </a:rPr>
-              <a:t>AutonomyLevelCode is not yet the range of hasAutonomousRoleCode (still generic Code); the v0.0.3 branch adds owl:imports smx/lox to base C2SIM.rdf - a circular import (C2SIM &lt;-&gt; smx).</a:t>
-            </a:r>
-          </a:p>
-        </p:txBody>
-      </p:sp>
-      <p:sp>
-        <p:nvSpPr>
-          <p:cNvPr id="11" name="TextBox 10"/>
+              <a:t>four of the six new properties have no attachment point (V2) and hasAutonomousRoleCode still ranges over generic Code (P3); the derived XSD still offers Robot beside Platform as an ActorEntity (V5).</a:t>
+            </a:r>
+          </a:p>
+        </p:txBody>
+      </p:sp>
+      <p:sp>
+        <p:nvSpPr>
+          <p:cNvPr id="13" name="TextBox 12"/>
           <p:cNvSpPr txBox="1"/>
           <p:nvPr/>
         </p:nvSpPr>
@@ -15767,14 +16032,14 @@
                 </a:solidFill>
                 <a:latin typeface="Calibri"/>
               </a:rPr>
-              <a:t>log secs 1-2 (S2, D1-D5)  -  sec 9 (v0.0.3 reconciliation, finding by finding)  -  Ontology/C2SIM_ASX-v003.rdf on branch michael_d</a:t>
-            </a:r>
-          </a:p>
-        </p:txBody>
-      </p:sp>
-      <p:sp>
-        <p:nvSpPr>
-          <p:cNvPr id="12" name="TextBox 11"/>
+              <a:t>log secs 1-2 (S2, D1-D5)  -  sec 9 (v0.0.3) + sec 10 (v0.0.4 + decisions, incl. V2-V6)  -  Ontology/C2SIM_ASX-v004.rdf on branch michael_d</a:t>
+            </a:r>
+          </a:p>
+        </p:txBody>
+      </p:sp>
+      <p:sp>
+        <p:nvSpPr>
+          <p:cNvPr id="14" name="TextBox 13"/>
           <p:cNvSpPr txBox="1"/>
           <p:nvPr/>
         </p:nvSpPr>
@@ -15801,14 +16066,14 @@
                 </a:solidFill>
                 <a:latin typeface="Calibri"/>
               </a:rPr>
-              <a:t>C2SIM ASX Sub-group   |   Hyssos   |   July 2026</a:t>
-            </a:r>
-          </a:p>
-        </p:txBody>
-      </p:sp>
-      <p:sp>
-        <p:nvSpPr>
-          <p:cNvPr id="13" name="TextBox 12"/>
+              <a:t>C2SIM ASX Sub-group   |   Hyssos   |   October 2026</a:t>
+            </a:r>
+          </a:p>
+        </p:txBody>
+      </p:sp>
+      <p:sp>
+        <p:nvSpPr>
+          <p:cNvPr id="15" name="TextBox 14"/>
           <p:cNvSpPr txBox="1"/>
           <p:nvPr/>
         </p:nvSpPr>
@@ -15931,14 +16196,48 @@
                 </a:solidFill>
                 <a:latin typeface="Calibri"/>
               </a:rPr>
-              <a:t>First to settle: three structural typing decisions</a:t>
-            </a:r>
-          </a:p>
-        </p:txBody>
-      </p:sp>
-      <p:sp>
-        <p:nvSpPr>
-          <p:cNvPr id="4" name="Rounded Rectangle 3"/>
+              <a:t>The three structural typing decisions - now decided</a:t>
+            </a:r>
+          </a:p>
+        </p:txBody>
+      </p:sp>
+      <p:sp>
+        <p:nvSpPr>
+          <p:cNvPr id="4" name="TextBox 3"/>
+          <p:cNvSpPr txBox="1"/>
+          <p:nvPr/>
+        </p:nvSpPr>
+        <p:spPr>
+          <a:xfrm>
+            <a:off x="548640" y="914400"/>
+            <a:ext cx="10972800" cy="320040"/>
+          </a:xfrm>
+          <a:prstGeom prst="rect">
+            <a:avLst/>
+          </a:prstGeom>
+          <a:noFill/>
+        </p:spPr>
+        <p:txBody>
+          <a:bodyPr wrap="square">
+            <a:spAutoFit/>
+          </a:bodyPr>
+          <a:lstStyle/>
+          <a:p>
+            <a:r>
+              <a:rPr sz="1300" b="0" i="1">
+                <a:solidFill>
+                  <a:srgbClr val="2E869A"/>
+                </a:solidFill>
+                <a:latin typeface="Calibri"/>
+              </a:rPr>
+              <a:t>Settled by the sub-group (recorded 2026-10-14); what remains is applying them in the OWL</a:t>
+            </a:r>
+          </a:p>
+        </p:txBody>
+      </p:sp>
+      <p:sp>
+        <p:nvSpPr>
+          <p:cNvPr id="5" name="Rounded Rectangle 4"/>
           <p:cNvSpPr/>
           <p:nvPr/>
         </p:nvSpPr>
@@ -15951,7 +16250,7 @@
             <a:avLst/>
           </a:prstGeom>
           <a:solidFill>
-            <a:srgbClr val="C87F0A"/>
+            <a:srgbClr val="2E7D32"/>
           </a:solidFill>
           <a:ln>
             <a:noFill/>
@@ -15977,22 +16276,22 @@
           <a:p>
             <a:pPr algn="ctr"/>
             <a:r>
-              <a:rPr sz="1600" b="1" i="0">
+              <a:rPr sz="1500" b="1" i="0">
                 <a:solidFill>
                   <a:srgbClr val="FFFFFF"/>
                 </a:solidFill>
                 <a:latin typeface="Calibri"/>
               </a:rPr>
-              <a:t>P1
-UAV typing: Robot
-tree vs SMX Platform</a:t>
-            </a:r>
-          </a:p>
-        </p:txBody>
-      </p:sp>
-      <p:sp>
-        <p:nvSpPr>
-          <p:cNvPr id="5" name="Rounded Rectangle 4"/>
+              <a:t>P1  -  DECIDED
+autonomy = a role/facet on
+the existing Platform subtree</a:t>
+            </a:r>
+          </a:p>
+        </p:txBody>
+      </p:sp>
+      <p:sp>
+        <p:nvSpPr>
+          <p:cNvPr id="6" name="Rounded Rectangle 5"/>
           <p:cNvSpPr/>
           <p:nvPr/>
         </p:nvSpPr>
@@ -16005,7 +16304,7 @@
             <a:avLst/>
           </a:prstGeom>
           <a:solidFill>
-            <a:srgbClr val="C87F0A"/>
+            <a:srgbClr val="2E7D32"/>
           </a:solidFill>
           <a:ln>
             <a:noFill/>
@@ -16031,22 +16330,22 @@
           <a:p>
             <a:pPr algn="ctr"/>
             <a:r>
-              <a:rPr sz="1600" b="1" i="0">
+              <a:rPr sz="1500" b="1" i="0">
                 <a:solidFill>
                   <a:srgbClr val="FFFFFF"/>
                 </a:solidFill>
                 <a:latin typeface="Calibri"/>
               </a:rPr>
-              <a:t>P2
-Sensor: one
-representation to pick</a:t>
-            </a:r>
-          </a:p>
-        </p:txBody>
-      </p:sp>
-      <p:sp>
-        <p:nvSpPr>
-          <p:cNvPr id="6" name="Rounded Rectangle 5"/>
+              <a:t>P2  -  DIRECTION DECIDED
+sensors reworked on
+existing standards</a:t>
+            </a:r>
+          </a:p>
+        </p:txBody>
+      </p:sp>
+      <p:sp>
+        <p:nvSpPr>
+          <p:cNvPr id="7" name="Rounded Rectangle 6"/>
           <p:cNvSpPr/>
           <p:nvPr/>
         </p:nvSpPr>
@@ -16059,7 +16358,7 @@
             <a:avLst/>
           </a:prstGeom>
           <a:solidFill>
-            <a:srgbClr val="C87F0A"/>
+            <a:srgbClr val="2E7D32"/>
           </a:solidFill>
           <a:ln>
             <a:noFill/>
@@ -16085,29 +16384,29 @@
           <a:p>
             <a:pPr algn="ctr"/>
             <a:r>
-              <a:rPr sz="1600" b="1" i="0">
+              <a:rPr sz="1500" b="1" i="0">
                 <a:solidFill>
                   <a:srgbClr val="FFFFFF"/>
                 </a:solidFill>
                 <a:latin typeface="Calibri"/>
               </a:rPr>
-              <a:t>P7
-Swarm: make it
-taskable (ActorEntity)</a:t>
-            </a:r>
-          </a:p>
-        </p:txBody>
-      </p:sp>
-      <p:sp>
-        <p:nvSpPr>
-          <p:cNvPr id="7" name="TextBox 6"/>
+              <a:t>P7  -  DECIDED
+collective / Swarm derives
+from CollectiveEntity</a:t>
+            </a:r>
+          </a:p>
+        </p:txBody>
+      </p:sp>
+      <p:sp>
+        <p:nvSpPr>
+          <p:cNvPr id="8" name="TextBox 7"/>
           <p:cNvSpPr txBox="1"/>
           <p:nvPr/>
         </p:nvSpPr>
         <p:spPr>
           <a:xfrm>
-            <a:off x="640080" y="4297680"/>
-            <a:ext cx="10972800" cy="2057400"/>
+            <a:off x="640080" y="4206240"/>
+            <a:ext cx="10972800" cy="2148840"/>
           </a:xfrm>
           <a:prstGeom prst="rect">
             <a:avLst/>
@@ -16125,24 +16424,52 @@
                 <a:spcPts val="200"/>
               </a:spcBef>
               <a:spcAft>
-                <a:spcPts val="600"/>
+                <a:spcPts val="800"/>
               </a:spcAft>
             </a:pPr>
             <a:r>
-              <a:rPr sz="1700" b="1" i="0">
+              <a:rPr sz="1500" b="1" i="0">
                 <a:solidFill>
                   <a:srgbClr val="333333"/>
                 </a:solidFill>
                 <a:latin typeface="Calibri"/>
               </a:rPr>
-              <a:t>•  P1 and P7 are entity-typing (what a drone / a swarm IS); P2 is how a sensor is represented. All three are structural choices not yet settled - so Initialization, not Reports, is where the model gets exercised and pinned down first.</a:t>
-            </a:r>
-          </a:p>
-        </p:txBody>
-      </p:sp>
-      <p:sp>
-        <p:nvSpPr>
-          <p:cNvPr id="8" name="TextBox 7"/>
+              <a:t>•  P1 and P7 are entity-typing (what a drone / a swarm IS); P2 is how a sensor is represented. They were the structural choices Initialization could not be built without - and they are now made.</a:t>
+            </a:r>
+          </a:p>
+          <a:p>
+            <a:pPr>
+              <a:spcBef>
+                <a:spcPts val="200"/>
+              </a:spcBef>
+              <a:spcAft>
+                <a:spcPts val="800"/>
+              </a:spcAft>
+            </a:pPr>
+            <a:r>
+              <a:rPr sz="1500" b="1" i="0">
+                <a:solidFill>
+                  <a:srgbClr val="C87F0A"/>
+                </a:solidFill>
+                <a:latin typeface="Calibri"/>
+              </a:rPr>
+              <a:t>•  Where v0.0.4 stands against them:  </a:t>
+            </a:r>
+            <a:r>
+              <a:rPr sz="1500" b="0" i="0">
+                <a:solidFill>
+                  <a:srgbClr val="333333"/>
+                </a:solidFill>
+                <a:latin typeface="Calibri"/>
+              </a:rPr>
+              <a:t>P1 half-applied (the facet exists on smx#Vehicle; the Robot tree is still declared); P7 not yet applied; P2 placeholders only. The next three slides show each decision and its residual.</a:t>
+            </a:r>
+          </a:p>
+        </p:txBody>
+      </p:sp>
+      <p:sp>
+        <p:nvSpPr>
+          <p:cNvPr id="9" name="TextBox 8"/>
           <p:cNvSpPr txBox="1"/>
           <p:nvPr/>
         </p:nvSpPr>
@@ -16178,14 +16505,14 @@
                 </a:solidFill>
                 <a:latin typeface="Calibri"/>
               </a:rPr>
-              <a:t>Initialization-Walk.md  -  log sec 5 (P-series)</a:t>
-            </a:r>
-          </a:p>
-        </p:txBody>
-      </p:sp>
-      <p:sp>
-        <p:nvSpPr>
-          <p:cNvPr id="9" name="TextBox 8"/>
+              <a:t>Initialization-Walk.md  -  log sec 5 (P-series) + sec 10 (decisions + residuals)</a:t>
+            </a:r>
+          </a:p>
+        </p:txBody>
+      </p:sp>
+      <p:sp>
+        <p:nvSpPr>
+          <p:cNvPr id="10" name="TextBox 9"/>
           <p:cNvSpPr txBox="1"/>
           <p:nvPr/>
         </p:nvSpPr>
@@ -16212,14 +16539,14 @@
                 </a:solidFill>
                 <a:latin typeface="Calibri"/>
               </a:rPr>
-              <a:t>C2SIM ASX Sub-group   |   Hyssos   |   July 2026</a:t>
-            </a:r>
-          </a:p>
-        </p:txBody>
-      </p:sp>
-      <p:sp>
-        <p:nvSpPr>
-          <p:cNvPr id="10" name="TextBox 9"/>
+              <a:t>C2SIM ASX Sub-group   |   Hyssos   |   October 2026</a:t>
+            </a:r>
+          </a:p>
+        </p:txBody>
+      </p:sp>
+      <p:sp>
+        <p:nvSpPr>
+          <p:cNvPr id="11" name="TextBox 10"/>
           <p:cNvSpPr txBox="1"/>
           <p:nvPr/>
         </p:nvSpPr>
@@ -16789,8 +17116,8 @@
         </p:nvSpPr>
         <p:spPr>
           <a:xfrm>
-            <a:off x="640080" y="4434840"/>
-            <a:ext cx="10972800" cy="1920240"/>
+            <a:off x="640080" y="4572000"/>
+            <a:ext cx="10972800" cy="1783080"/>
           </a:xfrm>
           <a:prstGeom prst="rect">
             <a:avLst/>
@@ -16808,11 +17135,11 @@
                 <a:spcPts val="200"/>
               </a:spcBef>
               <a:spcAft>
-                <a:spcPts val="600"/>
+                <a:spcPts val="300"/>
               </a:spcAft>
             </a:pPr>
             <a:r>
-              <a:rPr sz="1300" b="0" i="0">
+              <a:rPr sz="1150" b="0" i="0">
                 <a:solidFill>
                   <a:srgbClr val="333333"/>
                 </a:solidFill>
@@ -16827,11 +17154,11 @@
                 <a:spcPts val="200"/>
               </a:spcBef>
               <a:spcAft>
-                <a:spcPts val="600"/>
+                <a:spcPts val="300"/>
               </a:spcAft>
             </a:pPr>
             <a:r>
-              <a:rPr sz="1300" b="0" i="0">
+              <a:rPr sz="1150" b="0" i="0">
                 <a:solidFill>
                   <a:srgbClr val="333333"/>
                 </a:solidFill>
@@ -16846,26 +17173,26 @@
                 <a:spcPts val="200"/>
               </a:spcBef>
               <a:spcAft>
-                <a:spcPts val="600"/>
+                <a:spcPts val="300"/>
               </a:spcAft>
             </a:pPr>
             <a:r>
-              <a:rPr sz="1300" b="1" i="0">
-                <a:solidFill>
-                  <a:srgbClr val="C87F0A"/>
-                </a:solidFill>
-                <a:latin typeface="Calibri"/>
-              </a:rPr>
-              <a:t>•  Now in v0.0.3:  </a:t>
-            </a:r>
-            <a:r>
-              <a:rPr sz="1300" b="0" i="0">
+              <a:rPr sz="1150" b="1" i="0">
+                <a:solidFill>
+                  <a:srgbClr val="2E7D32"/>
+                </a:solidFill>
+                <a:latin typeface="Calibri"/>
+              </a:rPr>
+              <a:t>•  DECIDED (Q-A):  </a:t>
+            </a:r>
+            <a:r>
+              <a:rPr sz="1150" b="0" i="0">
                 <a:solidFill>
                   <a:srgbClr val="333333"/>
                 </a:solidFill>
                 <a:latin typeface="Calibri"/>
               </a:rPr>
-              <a:t>both trees are declared - UAV/UGV under Robot AND UnmannedAerial/Ground/Maritime/UnderwaterVehicle under SMX Vehicle - so this choice is now in the model to settle.</a:t>
+              <a:t>ASX autonomy is a role/facet on the existing Platform subtree, not a parallel Robot tree.</a:t>
             </a:r>
           </a:p>
           <a:p>
@@ -16874,26 +17201,54 @@
                 <a:spcPts val="200"/>
               </a:spcBef>
               <a:spcAft>
-                <a:spcPts val="600"/>
+                <a:spcPts val="300"/>
               </a:spcAft>
             </a:pPr>
             <a:r>
-              <a:rPr sz="1300" b="1" i="0">
+              <a:rPr sz="1150" b="1" i="0">
+                <a:solidFill>
+                  <a:srgbClr val="C87F0A"/>
+                </a:solidFill>
+                <a:latin typeface="Calibri"/>
+              </a:rPr>
+              <a:t>•  Now in v0.0.4:  </a:t>
+            </a:r>
+            <a:r>
+              <a:rPr sz="1150" b="0" i="0">
+                <a:solidFill>
+                  <a:srgbClr val="333333"/>
+                </a:solidFill>
+                <a:latin typeface="Calibri"/>
+              </a:rPr>
+              <a:t>half there - smx#Vehicle carries hasControlMode (AutonomyLevelCode) with the four Unmanned*Vehicle classes under it; but Robot/UAV/UGV are still declared, and the derived XSD still offers Robot as a fourth ActorEntity choice beside Platform.</a:t>
+            </a:r>
+          </a:p>
+          <a:p>
+            <a:pPr>
+              <a:spcBef>
+                <a:spcPts val="200"/>
+              </a:spcBef>
+              <a:spcAft>
+                <a:spcPts val="300"/>
+              </a:spcAft>
+            </a:pPr>
+            <a:r>
+              <a:rPr sz="1150" b="1" i="0">
                 <a:solidFill>
                   <a:srgbClr val="2E869A"/>
                 </a:solidFill>
                 <a:latin typeface="Calibri"/>
               </a:rPr>
-              <a:t>•  Decision (Q-A):  </a:t>
-            </a:r>
-            <a:r>
-              <a:rPr sz="1300" b="0" i="0">
+              <a:t>•  To apply:  </a:t>
+            </a:r>
+            <a:r>
+              <a:rPr sz="1150" b="0" i="0">
                 <a:solidFill>
                   <a:srgbClr val="333333"/>
                 </a:solidFill>
                 <a:latin typeface="Calibri"/>
               </a:rPr>
-              <a:t>make ASX autonomy a role/facet on the existing Platform subtree instead of a parallel Robot tree?</a:t>
+              <a:t>retire the Robot tree; decide Vehicle-vs-Platform for the facet (Concept Mapping says Platform); re-parent the maritime pair (V1); home the four floating v0.0.4 properties (V2) and hasAutonomousRoleCode (P3).</a:t>
             </a:r>
           </a:p>
         </p:txBody>
@@ -16936,7 +17291,7 @@
                 </a:solidFill>
                 <a:latin typeface="Calibri"/>
               </a:rPr>
-              <a:t>Initialization-Walk.md  -  log P1 (sec 5) + sec 9 (v0.0.3 makes it concrete)  -  decision Q-A (log sec 7)</a:t>
+              <a:t>Initialization-Walk.md  -  log P1 (sec 5) + sec 10 (v0.0.4 + decision)  -  Q-A (log sec 7, decided)</a:t>
             </a:r>
           </a:p>
         </p:txBody>
@@ -16970,7 +17325,7 @@
                 </a:solidFill>
                 <a:latin typeface="Calibri"/>
               </a:rPr>
-              <a:t>C2SIM ASX Sub-group   |   Hyssos   |   July 2026</a:t>
+              <a:t>C2SIM ASX Sub-group   |   Hyssos   |   October 2026</a:t>
             </a:r>
           </a:p>
         </p:txBody>

--- a/Subgroups/ASX/InstantiationReview/ASX-Instantiation-Findings.pptx
+++ b/Subgroups/ASX/InstantiationReview/ASX-Instantiation-Findings.pptx
@@ -689,7 +689,7 @@
           </a:p>
           <a:p>
             <a:r>
-              <a:t>Decided by the sub-group: derive the collective/Swarm from CollectiveEntity. Current state: v0.0.3 dropped the Swarm class and v0.0.4 leaves CollecticeRoboticSystem (the typo is in the model - O1, now also in the XSD) under PhysicalEntity - so this is the first thing to apply, and the cheapest: one re-parenting axiom plus the spelling fix. Membership and command relations already exist, so the residual swarm work after that is small (Q-J).</a:t>
+              <a:t>Decided by the sub-group: derive the collective/Swarm from CollectiveEntity. Current state: v0.0.3 dropped the Swarm class and v0.0.4 leaves the collective class under PhysicalEntity (its O1 misspelling is fixed in PR #9) - so this is the first thing to apply, and the cheapest: one re-parenting axiom. Membership and command relations already exist, so the residual swarm work after that is small (Q-J).</a:t>
             </a:r>
           </a:p>
         </p:txBody>
@@ -1304,7 +1304,7 @@
           </a:p>
           <a:p>
             <a:r>
-              <a:t>The same decisions, grouped by commitment level: safe corrections (typos, the UUIDBase slip) are unambiguous; the structural decisions are now made and need applying in the OWL; content types need design. Nothing has been applied to the model or the workbooks by this review - the structural items are the group's decisions, the rest are proposals pending buy-in.</a:t>
+              <a:t>The same decisions, grouped by commitment level: safe corrections (typos, the UUIDBase slip) are unambiguous; the structural decisions are now made and need applying in the OWL; content types need design. Apart from the typo fixes (PR #9, pending merge), nothing has been applied to the model or the workbooks by this review - the structural items are the group's decisions, the rest are proposals pending buy-in.</a:t>
             </a:r>
           </a:p>
           <a:p>
@@ -1454,7 +1454,7 @@
           <a:lstStyle/>
           <a:p>
             <a:r>
-              <a:t>The recommended order now that the structural decisions are made: apply P7 (cheapest, one axiom), apply P1 (retire the Robot tree and home the new properties), run the sensor survey, fix the typos and finish the attribute layer, then re-cut the Initialization tabs and add the two CASEVAC content types; optionally adopt the diff-able workbooks so message edits can be reviewed in git.</a:t>
+              <a:t>The recommended order now that the structural decisions are made: apply P7 (cheapest, one axiom), apply P1 (retire the Robot tree and home the new properties), run the sensor survey, merge the typo fixes (PR #9) and finish the attribute layer, then re-cut the Initialization tabs and add the two CASEVAC content types; optionally adopt the diff-able workbooks so message edits can be reviewed in git.</a:t>
             </a:r>
           </a:p>
           <a:p>
@@ -6388,7 +6388,7 @@
                 </a:solidFill>
                 <a:latin typeface="Calibri"/>
               </a:rPr>
-              <a:t>CollecticeRoboticSystem (sic)</a:t>
+              <a:t>CollectiveRoboticSystem</a:t>
             </a:r>
           </a:p>
         </p:txBody>
@@ -6921,7 +6921,7 @@
                 </a:solidFill>
                 <a:latin typeface="Calibri"/>
               </a:rPr>
-              <a:t>not yet applied - no Swarm class (dropped in v0.0.3); CollecticeRoboticSystem (sic) still under RoboticSystem -&gt; Device -&gt; Artifact -&gt; PhysicalEntity, and now also in the derived XSD.</a:t>
+              <a:t>not yet applied - no Swarm class (dropped in v0.0.3); the collective class is still under RoboticSystem -&gt; Device -&gt; Artifact -&gt; PhysicalEntity (its O1 misspelling is fixed in PR #9).</a:t>
             </a:r>
           </a:p>
           <a:p>
@@ -6949,7 +6949,7 @@
                 </a:solidFill>
                 <a:latin typeface="Calibri"/>
               </a:rPr>
-              <a:t>re-parent (and re-spell, O1) the collective class under CollectiveEntity - one axiom - then the small residuals (Q-J: network params, leader role, aggregation Z1, lifecycle Z2); mixed membership (P10) becomes hasSubordinate over Platform subtypes.</a:t>
+              <a:t>re-parent the collective class under CollectiveEntity - one axiom - then the small residuals (Q-J: network params, leader role, aggregation Z1, lifecycle Z2); mixed membership (P10) becomes hasSubordinate over Platform subtypes.</a:t>
             </a:r>
           </a:p>
         </p:txBody>
@@ -10353,7 +10353,7 @@
                 </a:solidFill>
                 <a:latin typeface="Calibri"/>
               </a:rPr>
-              <a:t>Pending group buy-in - nothing applied to the model</a:t>
+              <a:t>Pending group buy-in - only the typo fixes are written (PR #9)</a:t>
             </a:r>
           </a:p>
         </p:txBody>
@@ -10404,7 +10404,7 @@
                 </a:solidFill>
                 <a:latin typeface="Calibri"/>
               </a:rPr>
-              <a:t>class typo CollecticeRoboticSystem -&gt; CollectiveRoboticSystem (O1); versionInfo Extrension -&gt; Extension (O2); file CSIM_ASX -&gt; C2SIM_ASX (O3); hasStartTime UUIDBase -&gt; TimeInstant (M7); unify namespace label ASX / C2SIM_ASX (M8).</a:t>
+              <a:t>typos fixed in PR #9 - CollectiveRoboticSystem (O1), hasAutonomousParameters (O4), versionInfo (O5), Operator comment (O6), pointer to the live file (O3); O2 already gone in v0.0.4. Still to apply: hasStartTime UUIDBase -&gt; TimeInstant (M7); unify namespace label ASX / C2SIM_ASX (M8).</a:t>
             </a:r>
           </a:p>
           <a:p>
@@ -10432,7 +10432,7 @@
                 </a:solidFill>
                 <a:latin typeface="Calibri"/>
               </a:rPr>
-              <a:t>autonomy as a facet on the Platform subtree, Robot tree retired (Q-A); collective -&gt; CollectiveEntity (Q-B); sensors reworked on existing standards (Q-C); state the one autonomy vocabulary (Q-D). Plus the new v0.0.4 typos (hasAutonomusParameters O4, versionInfo O5, Operator comment O6) and the four floating properties (V2).</a:t>
+              <a:t>autonomy as a facet on the Platform subtree, Robot tree retired (Q-A); collective -&gt; CollectiveEntity (Q-B); sensors reworked on existing standards (Q-C); state the one autonomy vocabulary (Q-D). Plus the four floating properties (V2).</a:t>
             </a:r>
           </a:p>
           <a:p>
@@ -10479,7 +10479,7 @@
                 </a:solidFill>
                 <a:latin typeface="Calibri"/>
               </a:rPr>
-              <a:t>•  Nothing here is applied to the model - all items are proposals for group buy-in.</a:t>
+              <a:t>•  Only the typo fixes are written (PR #9, pending merge into michael_d); everything else is a proposal for group buy-in.</a:t>
             </a:r>
           </a:p>
         </p:txBody>
@@ -11160,7 +11160,7 @@
                 </a:solidFill>
                 <a:latin typeface="Calibri"/>
               </a:rPr>
-              <a:t>•  Apply P7 in the OWL: re-parent (and re-spell) the collective class under CollectiveEntity - one axiom.</a:t>
+              <a:t>•  Apply P7 in the OWL: re-parent the collective class under CollectiveEntity - one axiom (its re-spelling is in PR #9).</a:t>
             </a:r>
           </a:p>
           <a:p>
@@ -11217,7 +11217,7 @@
                 </a:solidFill>
                 <a:latin typeface="Calibri"/>
               </a:rPr>
-              <a:t>•  Fix the typos while the classes are open (O1, O4, O5, O6); finish the attribute layer still marked x in the Concept Mapping (Payload, Mobility, Swarm Parameters).</a:t>
+              <a:t>•  Merge the typo fixes (PR #9: O1, O4, O5, O6); finish the attribute layer still marked x in the Concept Mapping (Payload, Mobility, Swarm Parameters).</a:t>
             </a:r>
           </a:p>
           <a:p>

--- a/Subgroups/ASX/InstantiationReview/ASX-Instantiation-Findings.pptx
+++ b/Subgroups/ASX/InstantiationReview/ASX-Instantiation-Findings.pptx
@@ -10479,7 +10479,7 @@
                 </a:solidFill>
                 <a:latin typeface="Calibri"/>
               </a:rPr>
-              <a:t>•  Only the typo fixes are written (PR #9, pending merge into michael_d); everything else is a proposal for group buy-in.</a:t>
+              <a:t>•  Only the typo fixes are written (PR #9, pending merge into main); everything else is a proposal for group buy-in.</a:t>
             </a:r>
           </a:p>
         </p:txBody>

--- a/Subgroups/ASX/InstantiationReview/ASX-Instantiation-Findings.pptx
+++ b/Subgroups/ASX/InstantiationReview/ASX-Instantiation-Findings.pptx
@@ -1304,7 +1304,7 @@
           </a:p>
           <a:p>
             <a:r>
-              <a:t>The same decisions, grouped by commitment level: safe corrections (typos, the UUIDBase slip) are unambiguous; the structural decisions are now made and need applying in the OWL; content types need design. Apart from the typo fixes (PR #9, pending merge), nothing has been applied to the model or the workbooks by this review - the structural items are the group's decisions, the rest are proposals pending buy-in.</a:t>
+              <a:t>The same decisions, grouped by commitment level: safe corrections (typos, the UUIDBase slip) are unambiguous; the structural decisions are now made and need applying in the OWL; content types need design. Apart from the typo fixes (PR #9, merged), nothing has been applied to the model or the workbooks by this review - the structural items are the group's decisions, the rest are proposals pending buy-in.</a:t>
             </a:r>
           </a:p>
           <a:p>
@@ -1454,7 +1454,7 @@
           <a:lstStyle/>
           <a:p>
             <a:r>
-              <a:t>The recommended order now that the structural decisions are made: apply P7 (cheapest, one axiom), apply P1 (retire the Robot tree and home the new properties), run the sensor survey, merge the typo fixes (PR #9) and finish the attribute layer, then re-cut the Initialization tabs and add the two CASEVAC content types; optionally adopt the diff-able workbooks so message edits can be reviewed in git.</a:t>
+              <a:t>The recommended order now that the structural decisions are made: apply P7 (cheapest, one axiom), apply P1 (retire the Robot tree and home the new properties), run the sensor survey, finish the attribute layer, then re-cut the Initialization tabs and add the two CASEVAC content types; optionally adopt the diff-able workbooks so message edits can be reviewed in git.</a:t>
             </a:r>
           </a:p>
           <a:p>
@@ -10353,7 +10353,7 @@
                 </a:solidFill>
                 <a:latin typeface="Calibri"/>
               </a:rPr>
-              <a:t>Pending group buy-in - only the typo fixes are written (PR #9)</a:t>
+              <a:t>Pending group buy-in - only the typo fixes are applied (PR #9)</a:t>
             </a:r>
           </a:p>
         </p:txBody>
@@ -10479,7 +10479,7 @@
                 </a:solidFill>
                 <a:latin typeface="Calibri"/>
               </a:rPr>
-              <a:t>•  Only the typo fixes are written (PR #9, pending merge into main); everything else is a proposal for group buy-in.</a:t>
+              <a:t>•  Only the typo fixes are applied (PR #9, merged into main); everything else is a proposal for group buy-in.</a:t>
             </a:r>
           </a:p>
         </p:txBody>
@@ -11217,7 +11217,7 @@
                 </a:solidFill>
                 <a:latin typeface="Calibri"/>
               </a:rPr>
-              <a:t>•  Merge the typo fixes (PR #9: O1, O4, O5, O6); finish the attribute layer still marked x in the Concept Mapping (Payload, Mobility, Swarm Parameters).</a:t>
+              <a:t>•  Finish the attribute layer still marked x in the Concept Mapping (Payload, Mobility, Swarm Parameters); the typo fixes (O1, O4-O6) are done (PR #9).</a:t>
             </a:r>
           </a:p>
           <a:p>
